--- a/tools/SemanticModelAudit/report/SemanticModelAuditReportBackgrounds.pptx
+++ b/tools/SemanticModelAudit/report/SemanticModelAuditReportBackgrounds.pptx
@@ -5,11 +5,12 @@
     <p:sldMasterId id="2147483648" r:id="rId1"/>
   </p:sldMasterIdLst>
   <p:notesMasterIdLst>
-    <p:notesMasterId r:id="rId4"/>
+    <p:notesMasterId r:id="rId5"/>
   </p:notesMasterIdLst>
   <p:sldIdLst>
-    <p:sldId id="261" r:id="rId2"/>
-    <p:sldId id="260" r:id="rId3"/>
+    <p:sldId id="256" r:id="rId2"/>
+    <p:sldId id="263" r:id="rId3"/>
+    <p:sldId id="264" r:id="rId4"/>
   </p:sldIdLst>
   <p:sldSz cx="12192000" cy="6858000"/>
   <p:notesSz cx="6858000" cy="9144000"/>
@@ -198,7 +199,7 @@
           <a:p>
             <a:fld id="{84B1CC70-1517-4D02-A712-9E68AF87EA56}" type="datetimeFigureOut">
               <a:rPr lang="en-US" smtClean="0"/>
-              <a:t>3/20/2025</a:t>
+              <a:t>4/7/2025</a:t>
             </a:fld>
             <a:endParaRPr lang="en-US"/>
           </a:p>
@@ -465,198 +466,6 @@
 </p:notesMaster>
 </file>
 
-<file path=ppt/notesSlides/notesSlide1.xml><?xml version="1.0" encoding="utf-8"?>
-<p:notes xmlns:a="http://schemas.openxmlformats.org/drawingml/2006/main" xmlns:r="http://schemas.openxmlformats.org/officeDocument/2006/relationships" xmlns:p="http://schemas.openxmlformats.org/presentationml/2006/main">
-  <p:cSld>
-    <p:spTree>
-      <p:nvGrpSpPr>
-        <p:cNvPr id="1" name="">
-          <a:extLst>
-            <a:ext uri="{FF2B5EF4-FFF2-40B4-BE49-F238E27FC236}">
-              <a16:creationId xmlns:a16="http://schemas.microsoft.com/office/drawing/2014/main" id="{5B1E79C3-FBB3-FFA8-CA78-C931A32A22B7}"/>
-            </a:ext>
-          </a:extLst>
-        </p:cNvPr>
-        <p:cNvGrpSpPr/>
-        <p:nvPr/>
-      </p:nvGrpSpPr>
-      <p:grpSpPr>
-        <a:xfrm>
-          <a:off x="0" y="0"/>
-          <a:ext cx="0" cy="0"/>
-          <a:chOff x="0" y="0"/>
-          <a:chExt cx="0" cy="0"/>
-        </a:xfrm>
-      </p:grpSpPr>
-      <p:sp>
-        <p:nvSpPr>
-          <p:cNvPr id="2" name="Slide Image Placeholder 1">
-            <a:extLst>
-              <a:ext uri="{FF2B5EF4-FFF2-40B4-BE49-F238E27FC236}">
-                <a16:creationId xmlns:a16="http://schemas.microsoft.com/office/drawing/2014/main" id="{6CFA6493-E38F-7D69-E68A-95FDFC9891D0}"/>
-              </a:ext>
-            </a:extLst>
-          </p:cNvPr>
-          <p:cNvSpPr>
-            <a:spLocks noGrp="1" noRot="1" noChangeAspect="1"/>
-          </p:cNvSpPr>
-          <p:nvPr>
-            <p:ph type="sldImg"/>
-          </p:nvPr>
-        </p:nvSpPr>
-        <p:spPr/>
-      </p:sp>
-      <p:sp>
-        <p:nvSpPr>
-          <p:cNvPr id="3" name="Notes Placeholder 2">
-            <a:extLst>
-              <a:ext uri="{FF2B5EF4-FFF2-40B4-BE49-F238E27FC236}">
-                <a16:creationId xmlns:a16="http://schemas.microsoft.com/office/drawing/2014/main" id="{5783F5C3-69EF-DE2E-ED10-C0E17A6D4321}"/>
-              </a:ext>
-            </a:extLst>
-          </p:cNvPr>
-          <p:cNvSpPr>
-            <a:spLocks noGrp="1"/>
-          </p:cNvSpPr>
-          <p:nvPr>
-            <p:ph type="body" idx="1"/>
-          </p:nvPr>
-        </p:nvSpPr>
-        <p:spPr/>
-        <p:txBody>
-          <a:bodyPr/>
-          <a:lstStyle/>
-          <a:p>
-            <a:endParaRPr lang="en-US" dirty="0"/>
-          </a:p>
-        </p:txBody>
-      </p:sp>
-      <p:sp>
-        <p:nvSpPr>
-          <p:cNvPr id="4" name="Slide Number Placeholder 3">
-            <a:extLst>
-              <a:ext uri="{FF2B5EF4-FFF2-40B4-BE49-F238E27FC236}">
-                <a16:creationId xmlns:a16="http://schemas.microsoft.com/office/drawing/2014/main" id="{5399C8E2-E287-D067-95A2-427DF38837A8}"/>
-              </a:ext>
-            </a:extLst>
-          </p:cNvPr>
-          <p:cNvSpPr>
-            <a:spLocks noGrp="1"/>
-          </p:cNvSpPr>
-          <p:nvPr>
-            <p:ph type="sldNum" sz="quarter" idx="5"/>
-          </p:nvPr>
-        </p:nvSpPr>
-        <p:spPr/>
-        <p:txBody>
-          <a:bodyPr/>
-          <a:lstStyle/>
-          <a:p>
-            <a:fld id="{27E99D4D-2AB2-47D6-BAF1-BBC8FBF7B873}" type="slidenum">
-              <a:rPr lang="en-US" smtClean="0"/>
-              <a:t>1</a:t>
-            </a:fld>
-            <a:endParaRPr lang="en-US"/>
-          </a:p>
-        </p:txBody>
-      </p:sp>
-    </p:spTree>
-    <p:extLst>
-      <p:ext uri="{BB962C8B-B14F-4D97-AF65-F5344CB8AC3E}">
-        <p14:creationId xmlns:p14="http://schemas.microsoft.com/office/powerpoint/2010/main" val="814669534"/>
-      </p:ext>
-    </p:extLst>
-  </p:cSld>
-  <p:clrMapOvr>
-    <a:masterClrMapping/>
-  </p:clrMapOvr>
-</p:notes>
-</file>
-
-<file path=ppt/notesSlides/notesSlide2.xml><?xml version="1.0" encoding="utf-8"?>
-<p:notes xmlns:a="http://schemas.openxmlformats.org/drawingml/2006/main" xmlns:r="http://schemas.openxmlformats.org/officeDocument/2006/relationships" xmlns:p="http://schemas.openxmlformats.org/presentationml/2006/main">
-  <p:cSld>
-    <p:spTree>
-      <p:nvGrpSpPr>
-        <p:cNvPr id="1" name=""/>
-        <p:cNvGrpSpPr/>
-        <p:nvPr/>
-      </p:nvGrpSpPr>
-      <p:grpSpPr>
-        <a:xfrm>
-          <a:off x="0" y="0"/>
-          <a:ext cx="0" cy="0"/>
-          <a:chOff x="0" y="0"/>
-          <a:chExt cx="0" cy="0"/>
-        </a:xfrm>
-      </p:grpSpPr>
-      <p:sp>
-        <p:nvSpPr>
-          <p:cNvPr id="2" name="Slide Image Placeholder 1"/>
-          <p:cNvSpPr>
-            <a:spLocks noGrp="1" noRot="1" noChangeAspect="1"/>
-          </p:cNvSpPr>
-          <p:nvPr>
-            <p:ph type="sldImg"/>
-          </p:nvPr>
-        </p:nvSpPr>
-        <p:spPr/>
-      </p:sp>
-      <p:sp>
-        <p:nvSpPr>
-          <p:cNvPr id="3" name="Notes Placeholder 2"/>
-          <p:cNvSpPr>
-            <a:spLocks noGrp="1"/>
-          </p:cNvSpPr>
-          <p:nvPr>
-            <p:ph type="body" idx="1"/>
-          </p:nvPr>
-        </p:nvSpPr>
-        <p:spPr/>
-        <p:txBody>
-          <a:bodyPr/>
-          <a:lstStyle/>
-          <a:p>
-            <a:endParaRPr lang="en-US" dirty="0"/>
-          </a:p>
-        </p:txBody>
-      </p:sp>
-      <p:sp>
-        <p:nvSpPr>
-          <p:cNvPr id="4" name="Slide Number Placeholder 3"/>
-          <p:cNvSpPr>
-            <a:spLocks noGrp="1"/>
-          </p:cNvSpPr>
-          <p:nvPr>
-            <p:ph type="sldNum" sz="quarter" idx="5"/>
-          </p:nvPr>
-        </p:nvSpPr>
-        <p:spPr/>
-        <p:txBody>
-          <a:bodyPr/>
-          <a:lstStyle/>
-          <a:p>
-            <a:fld id="{27E99D4D-2AB2-47D6-BAF1-BBC8FBF7B873}" type="slidenum">
-              <a:rPr lang="en-US" smtClean="0"/>
-              <a:t>2</a:t>
-            </a:fld>
-            <a:endParaRPr lang="en-US"/>
-          </a:p>
-        </p:txBody>
-      </p:sp>
-    </p:spTree>
-    <p:extLst>
-      <p:ext uri="{BB962C8B-B14F-4D97-AF65-F5344CB8AC3E}">
-        <p14:creationId xmlns:p14="http://schemas.microsoft.com/office/powerpoint/2010/main" val="844242735"/>
-      </p:ext>
-    </p:extLst>
-  </p:cSld>
-  <p:clrMapOvr>
-    <a:masterClrMapping/>
-  </p:clrMapOvr>
-</p:notes>
-</file>
-
 <file path=ppt/slideLayouts/slideLayout1.xml><?xml version="1.0" encoding="utf-8"?>
 <p:sldLayout xmlns:a="http://schemas.openxmlformats.org/drawingml/2006/main" xmlns:r="http://schemas.openxmlformats.org/officeDocument/2006/relationships" xmlns:p="http://schemas.openxmlformats.org/presentationml/2006/main" type="title" preserve="1">
   <p:cSld name="Title Slide">
@@ -804,7 +613,7 @@
           <a:p>
             <a:fld id="{D0427CD7-63F2-45BE-9E95-E93FC6C04848}" type="datetimeFigureOut">
               <a:rPr lang="en-US" smtClean="0"/>
-              <a:t>3/20/2025</a:t>
+              <a:t>4/7/2025</a:t>
             </a:fld>
             <a:endParaRPr lang="en-US"/>
           </a:p>
@@ -1002,7 +811,7 @@
           <a:p>
             <a:fld id="{D0427CD7-63F2-45BE-9E95-E93FC6C04848}" type="datetimeFigureOut">
               <a:rPr lang="en-US" smtClean="0"/>
-              <a:t>3/20/2025</a:t>
+              <a:t>4/7/2025</a:t>
             </a:fld>
             <a:endParaRPr lang="en-US"/>
           </a:p>
@@ -1210,7 +1019,7 @@
           <a:p>
             <a:fld id="{D0427CD7-63F2-45BE-9E95-E93FC6C04848}" type="datetimeFigureOut">
               <a:rPr lang="en-US" smtClean="0"/>
-              <a:t>3/20/2025</a:t>
+              <a:t>4/7/2025</a:t>
             </a:fld>
             <a:endParaRPr lang="en-US"/>
           </a:p>
@@ -1408,7 +1217,7 @@
           <a:p>
             <a:fld id="{D0427CD7-63F2-45BE-9E95-E93FC6C04848}" type="datetimeFigureOut">
               <a:rPr lang="en-US" smtClean="0"/>
-              <a:t>3/20/2025</a:t>
+              <a:t>4/7/2025</a:t>
             </a:fld>
             <a:endParaRPr lang="en-US"/>
           </a:p>
@@ -1683,7 +1492,7 @@
           <a:p>
             <a:fld id="{D0427CD7-63F2-45BE-9E95-E93FC6C04848}" type="datetimeFigureOut">
               <a:rPr lang="en-US" smtClean="0"/>
-              <a:t>3/20/2025</a:t>
+              <a:t>4/7/2025</a:t>
             </a:fld>
             <a:endParaRPr lang="en-US"/>
           </a:p>
@@ -1948,7 +1757,7 @@
           <a:p>
             <a:fld id="{D0427CD7-63F2-45BE-9E95-E93FC6C04848}" type="datetimeFigureOut">
               <a:rPr lang="en-US" smtClean="0"/>
-              <a:t>3/20/2025</a:t>
+              <a:t>4/7/2025</a:t>
             </a:fld>
             <a:endParaRPr lang="en-US"/>
           </a:p>
@@ -2360,7 +2169,7 @@
           <a:p>
             <a:fld id="{D0427CD7-63F2-45BE-9E95-E93FC6C04848}" type="datetimeFigureOut">
               <a:rPr lang="en-US" smtClean="0"/>
-              <a:t>3/20/2025</a:t>
+              <a:t>4/7/2025</a:t>
             </a:fld>
             <a:endParaRPr lang="en-US"/>
           </a:p>
@@ -2501,7 +2310,7 @@
           <a:p>
             <a:fld id="{D0427CD7-63F2-45BE-9E95-E93FC6C04848}" type="datetimeFigureOut">
               <a:rPr lang="en-US" smtClean="0"/>
-              <a:t>3/20/2025</a:t>
+              <a:t>4/7/2025</a:t>
             </a:fld>
             <a:endParaRPr lang="en-US"/>
           </a:p>
@@ -2614,7 +2423,7 @@
           <a:p>
             <a:fld id="{D0427CD7-63F2-45BE-9E95-E93FC6C04848}" type="datetimeFigureOut">
               <a:rPr lang="en-US" smtClean="0"/>
-              <a:t>3/20/2025</a:t>
+              <a:t>4/7/2025</a:t>
             </a:fld>
             <a:endParaRPr lang="en-US"/>
           </a:p>
@@ -2925,7 +2734,7 @@
           <a:p>
             <a:fld id="{D0427CD7-63F2-45BE-9E95-E93FC6C04848}" type="datetimeFigureOut">
               <a:rPr lang="en-US" smtClean="0"/>
-              <a:t>3/20/2025</a:t>
+              <a:t>4/7/2025</a:t>
             </a:fld>
             <a:endParaRPr lang="en-US"/>
           </a:p>
@@ -3213,7 +3022,7 @@
           <a:p>
             <a:fld id="{D0427CD7-63F2-45BE-9E95-E93FC6C04848}" type="datetimeFigureOut">
               <a:rPr lang="en-US" smtClean="0"/>
-              <a:t>3/20/2025</a:t>
+              <a:t>4/7/2025</a:t>
             </a:fld>
             <a:endParaRPr lang="en-US"/>
           </a:p>
@@ -3454,7 +3263,7 @@
           <a:p>
             <a:fld id="{D0427CD7-63F2-45BE-9E95-E93FC6C04848}" type="datetimeFigureOut">
               <a:rPr lang="en-US" smtClean="0"/>
-              <a:t>3/20/2025</a:t>
+              <a:t>4/7/2025</a:t>
             </a:fld>
             <a:endParaRPr lang="en-US"/>
           </a:p>
@@ -3859,10 +3668,1111 @@
   <p:cSld>
     <p:spTree>
       <p:nvGrpSpPr>
+        <p:cNvPr id="1" name=""/>
+        <p:cNvGrpSpPr/>
+        <p:nvPr/>
+      </p:nvGrpSpPr>
+      <p:grpSpPr>
+        <a:xfrm>
+          <a:off x="0" y="0"/>
+          <a:ext cx="0" cy="0"/>
+          <a:chOff x="0" y="0"/>
+          <a:chExt cx="0" cy="0"/>
+        </a:xfrm>
+      </p:grpSpPr>
+      <p:sp>
+        <p:nvSpPr>
+          <p:cNvPr id="15" name="Rectangle 14">
+            <a:extLst>
+              <a:ext uri="{FF2B5EF4-FFF2-40B4-BE49-F238E27FC236}">
+                <a16:creationId xmlns:a16="http://schemas.microsoft.com/office/drawing/2014/main" id="{64BA61B2-BD66-0368-4174-251EFDB283C7}"/>
+              </a:ext>
+            </a:extLst>
+          </p:cNvPr>
+          <p:cNvSpPr/>
+          <p:nvPr/>
+        </p:nvSpPr>
+        <p:spPr>
+          <a:xfrm>
+            <a:off x="0" y="45719"/>
+            <a:ext cx="12191999" cy="6812281"/>
+          </a:xfrm>
+          <a:prstGeom prst="rect">
+            <a:avLst/>
+          </a:prstGeom>
+          <a:solidFill>
+            <a:schemeClr val="bg1"/>
+          </a:solidFill>
+          <a:ln>
+            <a:noFill/>
+          </a:ln>
+        </p:spPr>
+        <p:style>
+          <a:lnRef idx="2">
+            <a:schemeClr val="accent1">
+              <a:shade val="15000"/>
+            </a:schemeClr>
+          </a:lnRef>
+          <a:fillRef idx="1">
+            <a:schemeClr val="accent1"/>
+          </a:fillRef>
+          <a:effectRef idx="0">
+            <a:schemeClr val="accent1"/>
+          </a:effectRef>
+          <a:fontRef idx="minor">
+            <a:schemeClr val="lt1"/>
+          </a:fontRef>
+        </p:style>
+        <p:txBody>
+          <a:bodyPr rtlCol="0" anchor="ctr"/>
+          <a:lstStyle/>
+          <a:p>
+            <a:pPr algn="ctr"/>
+            <a:endParaRPr lang="en-US"/>
+          </a:p>
+        </p:txBody>
+      </p:sp>
+      <p:sp>
+        <p:nvSpPr>
+          <p:cNvPr id="2" name="Rectangle 1">
+            <a:extLst>
+              <a:ext uri="{FF2B5EF4-FFF2-40B4-BE49-F238E27FC236}">
+                <a16:creationId xmlns:a16="http://schemas.microsoft.com/office/drawing/2014/main" id="{2C14D0CD-83B8-29E7-2813-5AE0B326D77D}"/>
+              </a:ext>
+            </a:extLst>
+          </p:cNvPr>
+          <p:cNvSpPr/>
+          <p:nvPr/>
+        </p:nvSpPr>
+        <p:spPr>
+          <a:xfrm>
+            <a:off x="-2" y="1015674"/>
+            <a:ext cx="12192002" cy="5843228"/>
+          </a:xfrm>
+          <a:prstGeom prst="rect">
+            <a:avLst/>
+          </a:prstGeom>
+          <a:solidFill>
+            <a:srgbClr val="F9FAFB"/>
+          </a:solidFill>
+          <a:ln>
+            <a:noFill/>
+          </a:ln>
+        </p:spPr>
+        <p:style>
+          <a:lnRef idx="2">
+            <a:schemeClr val="accent1">
+              <a:shade val="15000"/>
+            </a:schemeClr>
+          </a:lnRef>
+          <a:fillRef idx="1">
+            <a:schemeClr val="accent1"/>
+          </a:fillRef>
+          <a:effectRef idx="0">
+            <a:schemeClr val="accent1"/>
+          </a:effectRef>
+          <a:fontRef idx="minor">
+            <a:schemeClr val="lt1"/>
+          </a:fontRef>
+        </p:style>
+        <p:txBody>
+          <a:bodyPr rtlCol="0" anchor="ctr"/>
+          <a:lstStyle/>
+          <a:p>
+            <a:pPr algn="ctr"/>
+            <a:endParaRPr lang="en-US"/>
+          </a:p>
+        </p:txBody>
+      </p:sp>
+      <p:sp>
+        <p:nvSpPr>
+          <p:cNvPr id="4" name="Rectangle 3">
+            <a:extLst>
+              <a:ext uri="{FF2B5EF4-FFF2-40B4-BE49-F238E27FC236}">
+                <a16:creationId xmlns:a16="http://schemas.microsoft.com/office/drawing/2014/main" id="{531CE1DC-0C49-0AE2-5005-3EEEE4AB949B}"/>
+              </a:ext>
+            </a:extLst>
+          </p:cNvPr>
+          <p:cNvSpPr/>
+          <p:nvPr/>
+        </p:nvSpPr>
+        <p:spPr>
+          <a:xfrm>
+            <a:off x="0" y="0"/>
+            <a:ext cx="12192000" cy="45719"/>
+          </a:xfrm>
+          <a:prstGeom prst="rect">
+            <a:avLst/>
+          </a:prstGeom>
+          <a:gradFill flip="none" rotWithShape="1">
+            <a:gsLst>
+              <a:gs pos="50000">
+                <a:srgbClr val="239680"/>
+              </a:gs>
+              <a:gs pos="0">
+                <a:srgbClr val="84E9AB"/>
+              </a:gs>
+              <a:gs pos="100000">
+                <a:srgbClr val="1C8979"/>
+              </a:gs>
+            </a:gsLst>
+            <a:lin ang="0" scaled="1"/>
+            <a:tileRect/>
+          </a:gradFill>
+          <a:ln>
+            <a:noFill/>
+          </a:ln>
+        </p:spPr>
+        <p:style>
+          <a:lnRef idx="2">
+            <a:schemeClr val="accent1">
+              <a:shade val="15000"/>
+            </a:schemeClr>
+          </a:lnRef>
+          <a:fillRef idx="1">
+            <a:schemeClr val="accent1"/>
+          </a:fillRef>
+          <a:effectRef idx="0">
+            <a:schemeClr val="accent1"/>
+          </a:effectRef>
+          <a:fontRef idx="minor">
+            <a:schemeClr val="lt1"/>
+          </a:fontRef>
+        </p:style>
+        <p:txBody>
+          <a:bodyPr rtlCol="0" anchor="ctr"/>
+          <a:lstStyle/>
+          <a:p>
+            <a:pPr algn="ctr"/>
+            <a:endParaRPr lang="en-US"/>
+          </a:p>
+        </p:txBody>
+      </p:sp>
+      <p:sp>
+        <p:nvSpPr>
+          <p:cNvPr id="7" name="Rectangle: Rounded Corners 6">
+            <a:extLst>
+              <a:ext uri="{FF2B5EF4-FFF2-40B4-BE49-F238E27FC236}">
+                <a16:creationId xmlns:a16="http://schemas.microsoft.com/office/drawing/2014/main" id="{B17A0E92-1045-966A-31D0-8DB96065981A}"/>
+              </a:ext>
+            </a:extLst>
+          </p:cNvPr>
+          <p:cNvSpPr/>
+          <p:nvPr/>
+        </p:nvSpPr>
+        <p:spPr>
+          <a:xfrm>
+            <a:off x="3085323" y="110269"/>
+            <a:ext cx="9042401" cy="654838"/>
+          </a:xfrm>
+          <a:prstGeom prst="roundRect">
+            <a:avLst>
+              <a:gd name="adj" fmla="val 5980"/>
+            </a:avLst>
+          </a:prstGeom>
+          <a:solidFill>
+            <a:srgbClr val="F2F4F7"/>
+          </a:solidFill>
+          <a:ln w="12700">
+            <a:solidFill>
+              <a:srgbClr val="E6E6E6"/>
+            </a:solidFill>
+          </a:ln>
+        </p:spPr>
+        <p:style>
+          <a:lnRef idx="2">
+            <a:schemeClr val="accent1">
+              <a:shade val="15000"/>
+            </a:schemeClr>
+          </a:lnRef>
+          <a:fillRef idx="1">
+            <a:schemeClr val="accent1"/>
+          </a:fillRef>
+          <a:effectRef idx="0">
+            <a:schemeClr val="accent1"/>
+          </a:effectRef>
+          <a:fontRef idx="minor">
+            <a:schemeClr val="lt1"/>
+          </a:fontRef>
+        </p:style>
+        <p:txBody>
+          <a:bodyPr rtlCol="0" anchor="ctr"/>
+          <a:lstStyle/>
+          <a:p>
+            <a:pPr algn="ctr"/>
+            <a:endParaRPr lang="en-US"/>
+          </a:p>
+        </p:txBody>
+      </p:sp>
+      <p:cxnSp>
+        <p:nvCxnSpPr>
+          <p:cNvPr id="13" name="Straight Connector 12">
+            <a:extLst>
+              <a:ext uri="{FF2B5EF4-FFF2-40B4-BE49-F238E27FC236}">
+                <a16:creationId xmlns:a16="http://schemas.microsoft.com/office/drawing/2014/main" id="{A65D33EA-0B4D-A8EB-C571-33D8DB283F4A}"/>
+              </a:ext>
+            </a:extLst>
+          </p:cNvPr>
+          <p:cNvCxnSpPr>
+            <a:cxnSpLocks/>
+          </p:cNvCxnSpPr>
+          <p:nvPr/>
+        </p:nvCxnSpPr>
+        <p:spPr>
+          <a:xfrm>
+            <a:off x="0" y="1014770"/>
+            <a:ext cx="12191999" cy="0"/>
+          </a:xfrm>
+          <a:prstGeom prst="line">
+            <a:avLst/>
+          </a:prstGeom>
+          <a:ln w="19050">
+            <a:solidFill>
+              <a:srgbClr val="E6E6E6"/>
+            </a:solidFill>
+          </a:ln>
+        </p:spPr>
+        <p:style>
+          <a:lnRef idx="2">
+            <a:schemeClr val="accent1"/>
+          </a:lnRef>
+          <a:fillRef idx="0">
+            <a:schemeClr val="accent1"/>
+          </a:fillRef>
+          <a:effectRef idx="1">
+            <a:schemeClr val="accent1"/>
+          </a:effectRef>
+          <a:fontRef idx="minor">
+            <a:schemeClr val="tx1"/>
+          </a:fontRef>
+        </p:style>
+      </p:cxnSp>
+      <p:pic>
+        <p:nvPicPr>
+          <p:cNvPr id="36" name="Graphic 71">
+            <a:extLst>
+              <a:ext uri="{FF2B5EF4-FFF2-40B4-BE49-F238E27FC236}">
+                <a16:creationId xmlns:a16="http://schemas.microsoft.com/office/drawing/2014/main" id="{A7DE80AD-7BA2-5D0D-4237-F7E3ED2212D7}"/>
+              </a:ext>
+            </a:extLst>
+          </p:cNvPr>
+          <p:cNvPicPr>
+            <a:picLocks noChangeAspect="1"/>
+          </p:cNvPicPr>
+          <p:nvPr/>
+        </p:nvPicPr>
+        <p:blipFill>
+          <a:blip r:embed="rId2">
+            <a:extLst>
+              <a:ext uri="{96DAC541-7B7A-43D3-8B79-37D633B846F1}">
+                <asvg:svgBlip xmlns:asvg="http://schemas.microsoft.com/office/drawing/2016/SVG/main" r:embed="rId3"/>
+              </a:ext>
+            </a:extLst>
+          </a:blip>
+          <a:stretch>
+            <a:fillRect/>
+          </a:stretch>
+        </p:blipFill>
+        <p:spPr>
+          <a:xfrm>
+            <a:off x="64276" y="286596"/>
+            <a:ext cx="314742" cy="314743"/>
+          </a:xfrm>
+          <a:prstGeom prst="rect">
+            <a:avLst/>
+          </a:prstGeom>
+        </p:spPr>
+      </p:pic>
+      <p:cxnSp>
+        <p:nvCxnSpPr>
+          <p:cNvPr id="3" name="Straight Connector 2">
+            <a:extLst>
+              <a:ext uri="{FF2B5EF4-FFF2-40B4-BE49-F238E27FC236}">
+                <a16:creationId xmlns:a16="http://schemas.microsoft.com/office/drawing/2014/main" id="{8355C2EE-849F-94A9-2F73-FBDC8AFF69BE}"/>
+              </a:ext>
+            </a:extLst>
+          </p:cNvPr>
+          <p:cNvCxnSpPr>
+            <a:cxnSpLocks/>
+          </p:cNvCxnSpPr>
+          <p:nvPr/>
+        </p:nvCxnSpPr>
+        <p:spPr>
+          <a:xfrm flipV="1">
+            <a:off x="979806" y="842678"/>
+            <a:ext cx="130629" cy="175015"/>
+          </a:xfrm>
+          <a:prstGeom prst="line">
+            <a:avLst/>
+          </a:prstGeom>
+          <a:ln w="19050">
+            <a:solidFill>
+              <a:srgbClr val="E6E6E6"/>
+            </a:solidFill>
+          </a:ln>
+        </p:spPr>
+        <p:style>
+          <a:lnRef idx="2">
+            <a:schemeClr val="accent1"/>
+          </a:lnRef>
+          <a:fillRef idx="0">
+            <a:schemeClr val="accent1"/>
+          </a:fillRef>
+          <a:effectRef idx="1">
+            <a:schemeClr val="accent1"/>
+          </a:effectRef>
+          <a:fontRef idx="minor">
+            <a:schemeClr val="tx1"/>
+          </a:fontRef>
+        </p:style>
+      </p:cxnSp>
+      <p:cxnSp>
+        <p:nvCxnSpPr>
+          <p:cNvPr id="5" name="Straight Connector 4">
+            <a:extLst>
+              <a:ext uri="{FF2B5EF4-FFF2-40B4-BE49-F238E27FC236}">
+                <a16:creationId xmlns:a16="http://schemas.microsoft.com/office/drawing/2014/main" id="{D012D020-FF94-089A-0314-7F6571EDDA44}"/>
+              </a:ext>
+            </a:extLst>
+          </p:cNvPr>
+          <p:cNvCxnSpPr>
+            <a:cxnSpLocks/>
+          </p:cNvCxnSpPr>
+          <p:nvPr/>
+        </p:nvCxnSpPr>
+        <p:spPr>
+          <a:xfrm flipV="1">
+            <a:off x="2240658" y="842678"/>
+            <a:ext cx="130629" cy="175015"/>
+          </a:xfrm>
+          <a:prstGeom prst="line">
+            <a:avLst/>
+          </a:prstGeom>
+          <a:ln w="19050">
+            <a:solidFill>
+              <a:srgbClr val="E6E6E6"/>
+            </a:solidFill>
+          </a:ln>
+        </p:spPr>
+        <p:style>
+          <a:lnRef idx="2">
+            <a:schemeClr val="accent1"/>
+          </a:lnRef>
+          <a:fillRef idx="0">
+            <a:schemeClr val="accent1"/>
+          </a:fillRef>
+          <a:effectRef idx="1">
+            <a:schemeClr val="accent1"/>
+          </a:effectRef>
+          <a:fontRef idx="minor">
+            <a:schemeClr val="tx1"/>
+          </a:fontRef>
+        </p:style>
+      </p:cxnSp>
+      <p:sp>
+        <p:nvSpPr>
+          <p:cNvPr id="27" name="Rectangle: Rounded Corners 26">
+            <a:extLst>
+              <a:ext uri="{FF2B5EF4-FFF2-40B4-BE49-F238E27FC236}">
+                <a16:creationId xmlns:a16="http://schemas.microsoft.com/office/drawing/2014/main" id="{1B6AF470-79AA-23EA-58A1-3D022014C141}"/>
+              </a:ext>
+            </a:extLst>
+          </p:cNvPr>
+          <p:cNvSpPr/>
+          <p:nvPr/>
+        </p:nvSpPr>
+        <p:spPr>
+          <a:xfrm>
+            <a:off x="64274" y="2982057"/>
+            <a:ext cx="5978717" cy="1692682"/>
+          </a:xfrm>
+          <a:prstGeom prst="roundRect">
+            <a:avLst>
+              <a:gd name="adj" fmla="val 3700"/>
+            </a:avLst>
+          </a:prstGeom>
+          <a:solidFill>
+            <a:schemeClr val="bg1"/>
+          </a:solidFill>
+          <a:ln w="15875">
+            <a:solidFill>
+              <a:srgbClr val="E6E6E6"/>
+            </a:solidFill>
+          </a:ln>
+        </p:spPr>
+        <p:style>
+          <a:lnRef idx="2">
+            <a:schemeClr val="accent1">
+              <a:shade val="15000"/>
+            </a:schemeClr>
+          </a:lnRef>
+          <a:fillRef idx="1">
+            <a:schemeClr val="accent1"/>
+          </a:fillRef>
+          <a:effectRef idx="0">
+            <a:schemeClr val="accent1"/>
+          </a:effectRef>
+          <a:fontRef idx="minor">
+            <a:schemeClr val="lt1"/>
+          </a:fontRef>
+        </p:style>
+        <p:txBody>
+          <a:bodyPr rtlCol="0" anchor="ctr"/>
+          <a:lstStyle/>
+          <a:p>
+            <a:pPr algn="ctr"/>
+            <a:endParaRPr lang="en-US" dirty="0"/>
+          </a:p>
+        </p:txBody>
+      </p:sp>
+      <p:sp>
+        <p:nvSpPr>
+          <p:cNvPr id="28" name="Rectangle: Rounded Corners 27">
+            <a:extLst>
+              <a:ext uri="{FF2B5EF4-FFF2-40B4-BE49-F238E27FC236}">
+                <a16:creationId xmlns:a16="http://schemas.microsoft.com/office/drawing/2014/main" id="{3A65684C-8ADF-A513-2370-1F8E85B05F61}"/>
+              </a:ext>
+            </a:extLst>
+          </p:cNvPr>
+          <p:cNvSpPr/>
+          <p:nvPr/>
+        </p:nvSpPr>
+        <p:spPr>
+          <a:xfrm>
+            <a:off x="6149009" y="2982057"/>
+            <a:ext cx="5978715" cy="1692682"/>
+          </a:xfrm>
+          <a:prstGeom prst="roundRect">
+            <a:avLst>
+              <a:gd name="adj" fmla="val 3700"/>
+            </a:avLst>
+          </a:prstGeom>
+          <a:solidFill>
+            <a:schemeClr val="bg1"/>
+          </a:solidFill>
+          <a:ln w="15875">
+            <a:solidFill>
+              <a:srgbClr val="E6E6E6"/>
+            </a:solidFill>
+          </a:ln>
+        </p:spPr>
+        <p:style>
+          <a:lnRef idx="2">
+            <a:schemeClr val="accent1">
+              <a:shade val="15000"/>
+            </a:schemeClr>
+          </a:lnRef>
+          <a:fillRef idx="1">
+            <a:schemeClr val="accent1"/>
+          </a:fillRef>
+          <a:effectRef idx="0">
+            <a:schemeClr val="accent1"/>
+          </a:effectRef>
+          <a:fontRef idx="minor">
+            <a:schemeClr val="lt1"/>
+          </a:fontRef>
+        </p:style>
+        <p:txBody>
+          <a:bodyPr rtlCol="0" anchor="ctr"/>
+          <a:lstStyle/>
+          <a:p>
+            <a:pPr algn="ctr"/>
+            <a:endParaRPr lang="en-US" dirty="0"/>
+          </a:p>
+        </p:txBody>
+      </p:sp>
+      <p:sp>
+        <p:nvSpPr>
+          <p:cNvPr id="49" name="Rectangle: Rounded Corners 48">
+            <a:extLst>
+              <a:ext uri="{FF2B5EF4-FFF2-40B4-BE49-F238E27FC236}">
+                <a16:creationId xmlns:a16="http://schemas.microsoft.com/office/drawing/2014/main" id="{E221F8F9-7E99-6B98-CA44-C8636CEF8DE7}"/>
+              </a:ext>
+            </a:extLst>
+          </p:cNvPr>
+          <p:cNvSpPr/>
+          <p:nvPr/>
+        </p:nvSpPr>
+        <p:spPr>
+          <a:xfrm>
+            <a:off x="64274" y="1146962"/>
+            <a:ext cx="5978717" cy="1692682"/>
+          </a:xfrm>
+          <a:prstGeom prst="roundRect">
+            <a:avLst>
+              <a:gd name="adj" fmla="val 3700"/>
+            </a:avLst>
+          </a:prstGeom>
+          <a:solidFill>
+            <a:schemeClr val="bg1"/>
+          </a:solidFill>
+          <a:ln w="15875">
+            <a:solidFill>
+              <a:srgbClr val="E6E6E6"/>
+            </a:solidFill>
+          </a:ln>
+        </p:spPr>
+        <p:style>
+          <a:lnRef idx="2">
+            <a:schemeClr val="accent1">
+              <a:shade val="15000"/>
+            </a:schemeClr>
+          </a:lnRef>
+          <a:fillRef idx="1">
+            <a:schemeClr val="accent1"/>
+          </a:fillRef>
+          <a:effectRef idx="0">
+            <a:schemeClr val="accent1"/>
+          </a:effectRef>
+          <a:fontRef idx="minor">
+            <a:schemeClr val="lt1"/>
+          </a:fontRef>
+        </p:style>
+        <p:txBody>
+          <a:bodyPr rtlCol="0" anchor="ctr"/>
+          <a:lstStyle/>
+          <a:p>
+            <a:pPr algn="ctr"/>
+            <a:endParaRPr lang="en-US" dirty="0"/>
+          </a:p>
+        </p:txBody>
+      </p:sp>
+      <p:sp>
+        <p:nvSpPr>
+          <p:cNvPr id="50" name="Rectangle: Rounded Corners 49">
+            <a:extLst>
+              <a:ext uri="{FF2B5EF4-FFF2-40B4-BE49-F238E27FC236}">
+                <a16:creationId xmlns:a16="http://schemas.microsoft.com/office/drawing/2014/main" id="{3A4ADD44-0F30-CB49-0C38-E33AF6AFCC0F}"/>
+              </a:ext>
+            </a:extLst>
+          </p:cNvPr>
+          <p:cNvSpPr/>
+          <p:nvPr/>
+        </p:nvSpPr>
+        <p:spPr>
+          <a:xfrm>
+            <a:off x="6149009" y="1146962"/>
+            <a:ext cx="5978715" cy="1692682"/>
+          </a:xfrm>
+          <a:prstGeom prst="roundRect">
+            <a:avLst>
+              <a:gd name="adj" fmla="val 3700"/>
+            </a:avLst>
+          </a:prstGeom>
+          <a:solidFill>
+            <a:schemeClr val="bg1"/>
+          </a:solidFill>
+          <a:ln w="15875">
+            <a:solidFill>
+              <a:srgbClr val="E6E6E6"/>
+            </a:solidFill>
+          </a:ln>
+        </p:spPr>
+        <p:style>
+          <a:lnRef idx="2">
+            <a:schemeClr val="accent1">
+              <a:shade val="15000"/>
+            </a:schemeClr>
+          </a:lnRef>
+          <a:fillRef idx="1">
+            <a:schemeClr val="accent1"/>
+          </a:fillRef>
+          <a:effectRef idx="0">
+            <a:schemeClr val="accent1"/>
+          </a:effectRef>
+          <a:fontRef idx="minor">
+            <a:schemeClr val="lt1"/>
+          </a:fontRef>
+        </p:style>
+        <p:txBody>
+          <a:bodyPr rtlCol="0" anchor="ctr"/>
+          <a:lstStyle/>
+          <a:p>
+            <a:pPr algn="ctr"/>
+            <a:endParaRPr lang="en-US" dirty="0"/>
+          </a:p>
+        </p:txBody>
+      </p:sp>
+      <p:cxnSp>
+        <p:nvCxnSpPr>
+          <p:cNvPr id="40" name="Straight Connector 39">
+            <a:extLst>
+              <a:ext uri="{FF2B5EF4-FFF2-40B4-BE49-F238E27FC236}">
+                <a16:creationId xmlns:a16="http://schemas.microsoft.com/office/drawing/2014/main" id="{EDABF200-CA77-6A77-3D13-177B62EE64DD}"/>
+              </a:ext>
+            </a:extLst>
+          </p:cNvPr>
+          <p:cNvCxnSpPr>
+            <a:cxnSpLocks/>
+            <a:endCxn id="49" idx="1"/>
+          </p:cNvCxnSpPr>
+          <p:nvPr/>
+        </p:nvCxnSpPr>
+        <p:spPr>
+          <a:xfrm flipH="1">
+            <a:off x="64274" y="1993303"/>
+            <a:ext cx="1169723" cy="0"/>
+          </a:xfrm>
+          <a:prstGeom prst="line">
+            <a:avLst/>
+          </a:prstGeom>
+          <a:ln w="19050">
+            <a:solidFill>
+              <a:srgbClr val="E6E6E6"/>
+            </a:solidFill>
+          </a:ln>
+        </p:spPr>
+        <p:style>
+          <a:lnRef idx="2">
+            <a:schemeClr val="accent1"/>
+          </a:lnRef>
+          <a:fillRef idx="0">
+            <a:schemeClr val="accent1"/>
+          </a:fillRef>
+          <a:effectRef idx="1">
+            <a:schemeClr val="accent1"/>
+          </a:effectRef>
+          <a:fontRef idx="minor">
+            <a:schemeClr val="tx1"/>
+          </a:fontRef>
+        </p:style>
+      </p:cxnSp>
+      <p:cxnSp>
+        <p:nvCxnSpPr>
+          <p:cNvPr id="48" name="Straight Connector 47">
+            <a:extLst>
+              <a:ext uri="{FF2B5EF4-FFF2-40B4-BE49-F238E27FC236}">
+                <a16:creationId xmlns:a16="http://schemas.microsoft.com/office/drawing/2014/main" id="{C0D162F0-A8A3-FD69-CB7A-E43FC516AF5A}"/>
+              </a:ext>
+            </a:extLst>
+          </p:cNvPr>
+          <p:cNvCxnSpPr>
+            <a:cxnSpLocks/>
+          </p:cNvCxnSpPr>
+          <p:nvPr/>
+        </p:nvCxnSpPr>
+        <p:spPr>
+          <a:xfrm flipV="1">
+            <a:off x="1233997" y="1151996"/>
+            <a:ext cx="0" cy="1682583"/>
+          </a:xfrm>
+          <a:prstGeom prst="line">
+            <a:avLst/>
+          </a:prstGeom>
+          <a:ln w="19050">
+            <a:solidFill>
+              <a:srgbClr val="E6E6E6"/>
+            </a:solidFill>
+          </a:ln>
+        </p:spPr>
+        <p:style>
+          <a:lnRef idx="2">
+            <a:schemeClr val="accent1"/>
+          </a:lnRef>
+          <a:fillRef idx="0">
+            <a:schemeClr val="accent1"/>
+          </a:fillRef>
+          <a:effectRef idx="1">
+            <a:schemeClr val="accent1"/>
+          </a:effectRef>
+          <a:fontRef idx="minor">
+            <a:schemeClr val="tx1"/>
+          </a:fontRef>
+        </p:style>
+      </p:cxnSp>
+      <p:sp>
+        <p:nvSpPr>
+          <p:cNvPr id="53" name="Rectangle: Rounded Corners 52">
+            <a:extLst>
+              <a:ext uri="{FF2B5EF4-FFF2-40B4-BE49-F238E27FC236}">
+                <a16:creationId xmlns:a16="http://schemas.microsoft.com/office/drawing/2014/main" id="{7179198B-AA7B-D88D-C360-89D15BD7DC96}"/>
+              </a:ext>
+            </a:extLst>
+          </p:cNvPr>
+          <p:cNvSpPr/>
+          <p:nvPr/>
+        </p:nvSpPr>
+        <p:spPr>
+          <a:xfrm>
+            <a:off x="64274" y="4760654"/>
+            <a:ext cx="9000213" cy="2008244"/>
+          </a:xfrm>
+          <a:prstGeom prst="roundRect">
+            <a:avLst>
+              <a:gd name="adj" fmla="val 3700"/>
+            </a:avLst>
+          </a:prstGeom>
+          <a:solidFill>
+            <a:schemeClr val="bg1"/>
+          </a:solidFill>
+          <a:ln w="15875">
+            <a:solidFill>
+              <a:srgbClr val="E6E6E6"/>
+            </a:solidFill>
+          </a:ln>
+        </p:spPr>
+        <p:style>
+          <a:lnRef idx="2">
+            <a:schemeClr val="accent1">
+              <a:shade val="15000"/>
+            </a:schemeClr>
+          </a:lnRef>
+          <a:fillRef idx="1">
+            <a:schemeClr val="accent1"/>
+          </a:fillRef>
+          <a:effectRef idx="0">
+            <a:schemeClr val="accent1"/>
+          </a:effectRef>
+          <a:fontRef idx="minor">
+            <a:schemeClr val="lt1"/>
+          </a:fontRef>
+        </p:style>
+        <p:txBody>
+          <a:bodyPr rtlCol="0" anchor="ctr"/>
+          <a:lstStyle/>
+          <a:p>
+            <a:pPr algn="ctr"/>
+            <a:endParaRPr lang="en-US" dirty="0"/>
+          </a:p>
+        </p:txBody>
+      </p:sp>
+      <p:sp>
+        <p:nvSpPr>
+          <p:cNvPr id="54" name="Rectangle: Rounded Corners 53">
+            <a:extLst>
+              <a:ext uri="{FF2B5EF4-FFF2-40B4-BE49-F238E27FC236}">
+                <a16:creationId xmlns:a16="http://schemas.microsoft.com/office/drawing/2014/main" id="{6EDE8924-8F2B-818F-BACA-7ECCB815F9BE}"/>
+              </a:ext>
+            </a:extLst>
+          </p:cNvPr>
+          <p:cNvSpPr/>
+          <p:nvPr/>
+        </p:nvSpPr>
+        <p:spPr>
+          <a:xfrm>
+            <a:off x="9163879" y="4762748"/>
+            <a:ext cx="2963845" cy="2008244"/>
+          </a:xfrm>
+          <a:prstGeom prst="roundRect">
+            <a:avLst>
+              <a:gd name="adj" fmla="val 3700"/>
+            </a:avLst>
+          </a:prstGeom>
+          <a:solidFill>
+            <a:schemeClr val="bg1"/>
+          </a:solidFill>
+          <a:ln w="15875">
+            <a:solidFill>
+              <a:srgbClr val="E6E6E6"/>
+            </a:solidFill>
+          </a:ln>
+        </p:spPr>
+        <p:style>
+          <a:lnRef idx="2">
+            <a:schemeClr val="accent1">
+              <a:shade val="15000"/>
+            </a:schemeClr>
+          </a:lnRef>
+          <a:fillRef idx="1">
+            <a:schemeClr val="accent1"/>
+          </a:fillRef>
+          <a:effectRef idx="0">
+            <a:schemeClr val="accent1"/>
+          </a:effectRef>
+          <a:fontRef idx="minor">
+            <a:schemeClr val="lt1"/>
+          </a:fontRef>
+        </p:style>
+        <p:txBody>
+          <a:bodyPr rtlCol="0" anchor="ctr"/>
+          <a:lstStyle/>
+          <a:p>
+            <a:pPr algn="ctr"/>
+            <a:endParaRPr lang="en-US" dirty="0"/>
+          </a:p>
+        </p:txBody>
+      </p:sp>
+      <p:cxnSp>
+        <p:nvCxnSpPr>
+          <p:cNvPr id="55" name="Straight Connector 54">
+            <a:extLst>
+              <a:ext uri="{FF2B5EF4-FFF2-40B4-BE49-F238E27FC236}">
+                <a16:creationId xmlns:a16="http://schemas.microsoft.com/office/drawing/2014/main" id="{226FB5B1-C7DD-D9ED-F7F4-BF64F779CF8A}"/>
+              </a:ext>
+            </a:extLst>
+          </p:cNvPr>
+          <p:cNvCxnSpPr>
+            <a:cxnSpLocks/>
+            <a:endCxn id="27" idx="1"/>
+          </p:cNvCxnSpPr>
+          <p:nvPr/>
+        </p:nvCxnSpPr>
+        <p:spPr>
+          <a:xfrm flipH="1">
+            <a:off x="64274" y="3823364"/>
+            <a:ext cx="1169723" cy="5034"/>
+          </a:xfrm>
+          <a:prstGeom prst="line">
+            <a:avLst/>
+          </a:prstGeom>
+          <a:ln w="19050">
+            <a:solidFill>
+              <a:srgbClr val="E6E6E6"/>
+            </a:solidFill>
+          </a:ln>
+        </p:spPr>
+        <p:style>
+          <a:lnRef idx="2">
+            <a:schemeClr val="accent1"/>
+          </a:lnRef>
+          <a:fillRef idx="0">
+            <a:schemeClr val="accent1"/>
+          </a:fillRef>
+          <a:effectRef idx="1">
+            <a:schemeClr val="accent1"/>
+          </a:effectRef>
+          <a:fontRef idx="minor">
+            <a:schemeClr val="tx1"/>
+          </a:fontRef>
+        </p:style>
+      </p:cxnSp>
+      <p:cxnSp>
+        <p:nvCxnSpPr>
+          <p:cNvPr id="56" name="Straight Connector 55">
+            <a:extLst>
+              <a:ext uri="{FF2B5EF4-FFF2-40B4-BE49-F238E27FC236}">
+                <a16:creationId xmlns:a16="http://schemas.microsoft.com/office/drawing/2014/main" id="{6A2C04A0-4253-5261-DF3E-56FE58F2A7E5}"/>
+              </a:ext>
+            </a:extLst>
+          </p:cNvPr>
+          <p:cNvCxnSpPr>
+            <a:cxnSpLocks/>
+          </p:cNvCxnSpPr>
+          <p:nvPr/>
+        </p:nvCxnSpPr>
+        <p:spPr>
+          <a:xfrm flipV="1">
+            <a:off x="1233997" y="2982057"/>
+            <a:ext cx="0" cy="1682583"/>
+          </a:xfrm>
+          <a:prstGeom prst="line">
+            <a:avLst/>
+          </a:prstGeom>
+          <a:ln w="19050">
+            <a:solidFill>
+              <a:srgbClr val="E6E6E6"/>
+            </a:solidFill>
+          </a:ln>
+        </p:spPr>
+        <p:style>
+          <a:lnRef idx="2">
+            <a:schemeClr val="accent1"/>
+          </a:lnRef>
+          <a:fillRef idx="0">
+            <a:schemeClr val="accent1"/>
+          </a:fillRef>
+          <a:effectRef idx="1">
+            <a:schemeClr val="accent1"/>
+          </a:effectRef>
+          <a:fontRef idx="minor">
+            <a:schemeClr val="tx1"/>
+          </a:fontRef>
+        </p:style>
+      </p:cxnSp>
+      <p:cxnSp>
+        <p:nvCxnSpPr>
+          <p:cNvPr id="58" name="Straight Connector 57">
+            <a:extLst>
+              <a:ext uri="{FF2B5EF4-FFF2-40B4-BE49-F238E27FC236}">
+                <a16:creationId xmlns:a16="http://schemas.microsoft.com/office/drawing/2014/main" id="{B68C22EF-E3DE-E37A-0ABC-6920780D639F}"/>
+              </a:ext>
+            </a:extLst>
+          </p:cNvPr>
+          <p:cNvCxnSpPr>
+            <a:cxnSpLocks/>
+          </p:cNvCxnSpPr>
+          <p:nvPr/>
+        </p:nvCxnSpPr>
+        <p:spPr>
+          <a:xfrm flipH="1">
+            <a:off x="6157064" y="1988269"/>
+            <a:ext cx="1169723" cy="0"/>
+          </a:xfrm>
+          <a:prstGeom prst="line">
+            <a:avLst/>
+          </a:prstGeom>
+          <a:ln w="19050">
+            <a:solidFill>
+              <a:srgbClr val="E6E6E6"/>
+            </a:solidFill>
+          </a:ln>
+        </p:spPr>
+        <p:style>
+          <a:lnRef idx="2">
+            <a:schemeClr val="accent1"/>
+          </a:lnRef>
+          <a:fillRef idx="0">
+            <a:schemeClr val="accent1"/>
+          </a:fillRef>
+          <a:effectRef idx="1">
+            <a:schemeClr val="accent1"/>
+          </a:effectRef>
+          <a:fontRef idx="minor">
+            <a:schemeClr val="tx1"/>
+          </a:fontRef>
+        </p:style>
+      </p:cxnSp>
+      <p:cxnSp>
+        <p:nvCxnSpPr>
+          <p:cNvPr id="59" name="Straight Connector 58">
+            <a:extLst>
+              <a:ext uri="{FF2B5EF4-FFF2-40B4-BE49-F238E27FC236}">
+                <a16:creationId xmlns:a16="http://schemas.microsoft.com/office/drawing/2014/main" id="{92CA6B52-8F82-21A1-94D0-A13A4A6A4B6B}"/>
+              </a:ext>
+            </a:extLst>
+          </p:cNvPr>
+          <p:cNvCxnSpPr>
+            <a:cxnSpLocks/>
+          </p:cNvCxnSpPr>
+          <p:nvPr/>
+        </p:nvCxnSpPr>
+        <p:spPr>
+          <a:xfrm flipV="1">
+            <a:off x="7326787" y="1146962"/>
+            <a:ext cx="0" cy="1682583"/>
+          </a:xfrm>
+          <a:prstGeom prst="line">
+            <a:avLst/>
+          </a:prstGeom>
+          <a:ln w="19050">
+            <a:solidFill>
+              <a:srgbClr val="E6E6E6"/>
+            </a:solidFill>
+          </a:ln>
+        </p:spPr>
+        <p:style>
+          <a:lnRef idx="2">
+            <a:schemeClr val="accent1"/>
+          </a:lnRef>
+          <a:fillRef idx="0">
+            <a:schemeClr val="accent1"/>
+          </a:fillRef>
+          <a:effectRef idx="1">
+            <a:schemeClr val="accent1"/>
+          </a:effectRef>
+          <a:fontRef idx="minor">
+            <a:schemeClr val="tx1"/>
+          </a:fontRef>
+        </p:style>
+      </p:cxnSp>
+      <p:cxnSp>
+        <p:nvCxnSpPr>
+          <p:cNvPr id="60" name="Straight Connector 59">
+            <a:extLst>
+              <a:ext uri="{FF2B5EF4-FFF2-40B4-BE49-F238E27FC236}">
+                <a16:creationId xmlns:a16="http://schemas.microsoft.com/office/drawing/2014/main" id="{6FE46877-73A5-E88F-6460-96D50A38F75A}"/>
+              </a:ext>
+            </a:extLst>
+          </p:cNvPr>
+          <p:cNvCxnSpPr>
+            <a:cxnSpLocks/>
+          </p:cNvCxnSpPr>
+          <p:nvPr/>
+        </p:nvCxnSpPr>
+        <p:spPr>
+          <a:xfrm flipH="1">
+            <a:off x="6157064" y="3833463"/>
+            <a:ext cx="1169723" cy="0"/>
+          </a:xfrm>
+          <a:prstGeom prst="line">
+            <a:avLst/>
+          </a:prstGeom>
+          <a:ln w="19050">
+            <a:solidFill>
+              <a:srgbClr val="E6E6E6"/>
+            </a:solidFill>
+          </a:ln>
+        </p:spPr>
+        <p:style>
+          <a:lnRef idx="2">
+            <a:schemeClr val="accent1"/>
+          </a:lnRef>
+          <a:fillRef idx="0">
+            <a:schemeClr val="accent1"/>
+          </a:fillRef>
+          <a:effectRef idx="1">
+            <a:schemeClr val="accent1"/>
+          </a:effectRef>
+          <a:fontRef idx="minor">
+            <a:schemeClr val="tx1"/>
+          </a:fontRef>
+        </p:style>
+      </p:cxnSp>
+      <p:cxnSp>
+        <p:nvCxnSpPr>
+          <p:cNvPr id="61" name="Straight Connector 60">
+            <a:extLst>
+              <a:ext uri="{FF2B5EF4-FFF2-40B4-BE49-F238E27FC236}">
+                <a16:creationId xmlns:a16="http://schemas.microsoft.com/office/drawing/2014/main" id="{99896FD4-0672-91A5-2F3E-3CB809C9CE6B}"/>
+              </a:ext>
+            </a:extLst>
+          </p:cNvPr>
+          <p:cNvCxnSpPr>
+            <a:cxnSpLocks/>
+          </p:cNvCxnSpPr>
+          <p:nvPr/>
+        </p:nvCxnSpPr>
+        <p:spPr>
+          <a:xfrm flipV="1">
+            <a:off x="7326787" y="2992156"/>
+            <a:ext cx="0" cy="1682583"/>
+          </a:xfrm>
+          <a:prstGeom prst="line">
+            <a:avLst/>
+          </a:prstGeom>
+          <a:ln w="19050">
+            <a:solidFill>
+              <a:srgbClr val="E6E6E6"/>
+            </a:solidFill>
+          </a:ln>
+        </p:spPr>
+        <p:style>
+          <a:lnRef idx="2">
+            <a:schemeClr val="accent1"/>
+          </a:lnRef>
+          <a:fillRef idx="0">
+            <a:schemeClr val="accent1"/>
+          </a:fillRef>
+          <a:effectRef idx="1">
+            <a:schemeClr val="accent1"/>
+          </a:effectRef>
+          <a:fontRef idx="minor">
+            <a:schemeClr val="tx1"/>
+          </a:fontRef>
+        </p:style>
+      </p:cxnSp>
+    </p:spTree>
+    <p:extLst>
+      <p:ext uri="{BB962C8B-B14F-4D97-AF65-F5344CB8AC3E}">
+        <p14:creationId xmlns:p14="http://schemas.microsoft.com/office/powerpoint/2010/main" val="1449488978"/>
+      </p:ext>
+    </p:extLst>
+  </p:cSld>
+  <p:clrMapOvr>
+    <a:masterClrMapping/>
+  </p:clrMapOvr>
+</p:sld>
+</file>
+
+<file path=ppt/slides/slide2.xml><?xml version="1.0" encoding="utf-8"?>
+<p:sld xmlns:a="http://schemas.openxmlformats.org/drawingml/2006/main" xmlns:r="http://schemas.openxmlformats.org/officeDocument/2006/relationships" xmlns:p="http://schemas.openxmlformats.org/presentationml/2006/main">
+  <p:cSld>
+    <p:spTree>
+      <p:nvGrpSpPr>
         <p:cNvPr id="1" name="">
           <a:extLst>
             <a:ext uri="{FF2B5EF4-FFF2-40B4-BE49-F238E27FC236}">
-              <a16:creationId xmlns:a16="http://schemas.microsoft.com/office/drawing/2014/main" id="{7DD99A56-BAA9-7EBD-E250-5B0BFF86E106}"/>
+              <a16:creationId xmlns:a16="http://schemas.microsoft.com/office/drawing/2014/main" id="{02CECD6C-DE52-587B-11A1-CA811D173734}"/>
             </a:ext>
           </a:extLst>
         </p:cNvPr>
@@ -3882,7 +4792,7 @@
           <p:cNvPr id="15" name="Rectangle 14">
             <a:extLst>
               <a:ext uri="{FF2B5EF4-FFF2-40B4-BE49-F238E27FC236}">
-                <a16:creationId xmlns:a16="http://schemas.microsoft.com/office/drawing/2014/main" id="{8312BB27-424A-8A30-4F39-AAA7BB4F2A51}"/>
+                <a16:creationId xmlns:a16="http://schemas.microsoft.com/office/drawing/2014/main" id="{402C9FC3-45DF-FE60-D0ED-2669035FADBF}"/>
               </a:ext>
             </a:extLst>
           </p:cNvPr>
@@ -3891,8 +4801,60 @@
         </p:nvSpPr>
         <p:spPr>
           <a:xfrm>
-            <a:off x="1" y="795222"/>
-            <a:ext cx="12192000" cy="6062778"/>
+            <a:off x="0" y="45719"/>
+            <a:ext cx="12191999" cy="6812281"/>
+          </a:xfrm>
+          <a:prstGeom prst="rect">
+            <a:avLst/>
+          </a:prstGeom>
+          <a:solidFill>
+            <a:schemeClr val="bg1"/>
+          </a:solidFill>
+          <a:ln>
+            <a:noFill/>
+          </a:ln>
+        </p:spPr>
+        <p:style>
+          <a:lnRef idx="2">
+            <a:schemeClr val="accent1">
+              <a:shade val="15000"/>
+            </a:schemeClr>
+          </a:lnRef>
+          <a:fillRef idx="1">
+            <a:schemeClr val="accent1"/>
+          </a:fillRef>
+          <a:effectRef idx="0">
+            <a:schemeClr val="accent1"/>
+          </a:effectRef>
+          <a:fontRef idx="minor">
+            <a:schemeClr val="lt1"/>
+          </a:fontRef>
+        </p:style>
+        <p:txBody>
+          <a:bodyPr rtlCol="0" anchor="ctr"/>
+          <a:lstStyle/>
+          <a:p>
+            <a:pPr algn="ctr"/>
+            <a:endParaRPr lang="en-US"/>
+          </a:p>
+        </p:txBody>
+      </p:sp>
+      <p:sp>
+        <p:nvSpPr>
+          <p:cNvPr id="2" name="Rectangle 1">
+            <a:extLst>
+              <a:ext uri="{FF2B5EF4-FFF2-40B4-BE49-F238E27FC236}">
+                <a16:creationId xmlns:a16="http://schemas.microsoft.com/office/drawing/2014/main" id="{5A93B670-9DEE-3936-F233-2278671F4C30}"/>
+              </a:ext>
+            </a:extLst>
+          </p:cNvPr>
+          <p:cNvSpPr/>
+          <p:nvPr/>
+        </p:nvSpPr>
+        <p:spPr>
+          <a:xfrm>
+            <a:off x="-2" y="1015674"/>
+            <a:ext cx="12192002" cy="5843228"/>
           </a:xfrm>
           <a:prstGeom prst="rect">
             <a:avLst/>
@@ -3925,7 +4887,7 @@
           <a:lstStyle/>
           <a:p>
             <a:pPr algn="ctr"/>
-            <a:endParaRPr lang="en-US" dirty="0"/>
+            <a:endParaRPr lang="en-US"/>
           </a:p>
         </p:txBody>
       </p:sp>
@@ -3934,7 +4896,7 @@
           <p:cNvPr id="4" name="Rectangle 3">
             <a:extLst>
               <a:ext uri="{FF2B5EF4-FFF2-40B4-BE49-F238E27FC236}">
-                <a16:creationId xmlns:a16="http://schemas.microsoft.com/office/drawing/2014/main" id="{166277AE-CE42-4B1B-0414-77FD0891F6A2}"/>
+                <a16:creationId xmlns:a16="http://schemas.microsoft.com/office/drawing/2014/main" id="{CDF18AA0-40C5-0626-2AD1-C0B114624074}"/>
               </a:ext>
             </a:extLst>
           </p:cNvPr>
@@ -3949,9 +4911,21 @@
           <a:prstGeom prst="rect">
             <a:avLst/>
           </a:prstGeom>
-          <a:solidFill>
-            <a:srgbClr val="19B294"/>
-          </a:solidFill>
+          <a:gradFill flip="none" rotWithShape="1">
+            <a:gsLst>
+              <a:gs pos="50000">
+                <a:srgbClr val="239680"/>
+              </a:gs>
+              <a:gs pos="0">
+                <a:srgbClr val="84E9AB"/>
+              </a:gs>
+              <a:gs pos="100000">
+                <a:srgbClr val="1C8979"/>
+              </a:gs>
+            </a:gsLst>
+            <a:lin ang="0" scaled="1"/>
+            <a:tileRect/>
+          </a:gradFill>
           <a:ln>
             <a:noFill/>
           </a:ln>
@@ -3981,91 +4955,12 @@
           </a:p>
         </p:txBody>
       </p:sp>
-      <p:cxnSp>
-        <p:nvCxnSpPr>
-          <p:cNvPr id="13" name="Straight Connector 12">
-            <a:extLst>
-              <a:ext uri="{FF2B5EF4-FFF2-40B4-BE49-F238E27FC236}">
-                <a16:creationId xmlns:a16="http://schemas.microsoft.com/office/drawing/2014/main" id="{4D28D805-0C5E-7258-0C0D-93EC477F101B}"/>
-              </a:ext>
-            </a:extLst>
-          </p:cNvPr>
-          <p:cNvCxnSpPr>
-            <a:cxnSpLocks/>
-          </p:cNvCxnSpPr>
-          <p:nvPr/>
-        </p:nvCxnSpPr>
-        <p:spPr>
-          <a:xfrm>
-            <a:off x="0" y="795222"/>
-            <a:ext cx="12191999" cy="0"/>
-          </a:xfrm>
-          <a:prstGeom prst="line">
-            <a:avLst/>
-          </a:prstGeom>
-          <a:ln w="19050">
-            <a:solidFill>
-              <a:srgbClr val="E6E6E6"/>
-            </a:solidFill>
-          </a:ln>
-        </p:spPr>
-        <p:style>
-          <a:lnRef idx="2">
-            <a:schemeClr val="accent1"/>
-          </a:lnRef>
-          <a:fillRef idx="0">
-            <a:schemeClr val="accent1"/>
-          </a:fillRef>
-          <a:effectRef idx="1">
-            <a:schemeClr val="accent1"/>
-          </a:effectRef>
-          <a:fontRef idx="minor">
-            <a:schemeClr val="tx1"/>
-          </a:fontRef>
-        </p:style>
-      </p:cxnSp>
-      <p:pic>
-        <p:nvPicPr>
-          <p:cNvPr id="36" name="Graphic 71">
-            <a:extLst>
-              <a:ext uri="{FF2B5EF4-FFF2-40B4-BE49-F238E27FC236}">
-                <a16:creationId xmlns:a16="http://schemas.microsoft.com/office/drawing/2014/main" id="{F3B96C2C-7E08-6247-EFFD-032AE3C91DE0}"/>
-              </a:ext>
-            </a:extLst>
-          </p:cNvPr>
-          <p:cNvPicPr>
-            <a:picLocks noChangeAspect="1"/>
-          </p:cNvPicPr>
-          <p:nvPr/>
-        </p:nvPicPr>
-        <p:blipFill>
-          <a:blip r:embed="rId3">
-            <a:extLst>
-              <a:ext uri="{96DAC541-7B7A-43D3-8B79-37D633B846F1}">
-                <asvg:svgBlip xmlns:asvg="http://schemas.microsoft.com/office/drawing/2016/SVG/main" r:embed="rId4"/>
-              </a:ext>
-            </a:extLst>
-          </a:blip>
-          <a:stretch>
-            <a:fillRect/>
-          </a:stretch>
-        </p:blipFill>
-        <p:spPr>
-          <a:xfrm>
-            <a:off x="64276" y="286596"/>
-            <a:ext cx="314742" cy="314743"/>
-          </a:xfrm>
-          <a:prstGeom prst="rect">
-            <a:avLst/>
-          </a:prstGeom>
-        </p:spPr>
-      </p:pic>
-      <p:sp>
-        <p:nvSpPr>
-          <p:cNvPr id="2" name="Rectangle: Rounded Corners 1">
-            <a:extLst>
-              <a:ext uri="{FF2B5EF4-FFF2-40B4-BE49-F238E27FC236}">
-                <a16:creationId xmlns:a16="http://schemas.microsoft.com/office/drawing/2014/main" id="{3305782C-BA9D-4459-5901-87A149B9003F}"/>
+      <p:sp>
+        <p:nvSpPr>
+          <p:cNvPr id="7" name="Rectangle: Rounded Corners 6">
+            <a:extLst>
+              <a:ext uri="{FF2B5EF4-FFF2-40B4-BE49-F238E27FC236}">
+                <a16:creationId xmlns:a16="http://schemas.microsoft.com/office/drawing/2014/main" id="{29832F84-091B-4416-1C44-BE916B898CDE}"/>
               </a:ext>
             </a:extLst>
           </p:cNvPr>
@@ -4074,64 +4969,8 @@
         </p:nvSpPr>
         <p:spPr>
           <a:xfrm>
-            <a:off x="75316" y="872469"/>
-            <a:ext cx="2237913" cy="5907743"/>
-          </a:xfrm>
-          <a:prstGeom prst="roundRect">
-            <a:avLst>
-              <a:gd name="adj" fmla="val 1884"/>
-            </a:avLst>
-          </a:prstGeom>
-          <a:solidFill>
-            <a:schemeClr val="bg1"/>
-          </a:solidFill>
-          <a:ln w="15875">
-            <a:solidFill>
-              <a:srgbClr val="E6E6E6"/>
-            </a:solidFill>
-          </a:ln>
-        </p:spPr>
-        <p:style>
-          <a:lnRef idx="2">
-            <a:schemeClr val="accent1">
-              <a:shade val="15000"/>
-            </a:schemeClr>
-          </a:lnRef>
-          <a:fillRef idx="1">
-            <a:schemeClr val="accent1"/>
-          </a:fillRef>
-          <a:effectRef idx="0">
-            <a:schemeClr val="accent1"/>
-          </a:effectRef>
-          <a:fontRef idx="minor">
-            <a:schemeClr val="lt1"/>
-          </a:fontRef>
-        </p:style>
-        <p:txBody>
-          <a:bodyPr rtlCol="0" anchor="ctr"/>
-          <a:lstStyle/>
-          <a:p>
-            <a:pPr algn="ctr"/>
-            <a:endParaRPr lang="en-US"/>
-          </a:p>
-        </p:txBody>
-      </p:sp>
-      <p:sp>
-        <p:nvSpPr>
-          <p:cNvPr id="3" name="Rectangle: Rounded Corners 2">
-            <a:extLst>
-              <a:ext uri="{FF2B5EF4-FFF2-40B4-BE49-F238E27FC236}">
-                <a16:creationId xmlns:a16="http://schemas.microsoft.com/office/drawing/2014/main" id="{F7188A67-F7CE-406E-C4EE-915D212ABFEA}"/>
-              </a:ext>
-            </a:extLst>
-          </p:cNvPr>
-          <p:cNvSpPr/>
-          <p:nvPr/>
-        </p:nvSpPr>
-        <p:spPr>
-          <a:xfrm>
-            <a:off x="3406315" y="117526"/>
-            <a:ext cx="8721410" cy="587661"/>
+            <a:off x="3085323" y="110269"/>
+            <a:ext cx="9042401" cy="654838"/>
           </a:xfrm>
           <a:prstGeom prst="roundRect">
             <a:avLst>
@@ -4172,12 +5011,177 @@
           </a:p>
         </p:txBody>
       </p:sp>
-      <p:sp>
-        <p:nvSpPr>
-          <p:cNvPr id="8" name="Rectangle: Rounded Corners 7">
-            <a:extLst>
-              <a:ext uri="{FF2B5EF4-FFF2-40B4-BE49-F238E27FC236}">
-                <a16:creationId xmlns:a16="http://schemas.microsoft.com/office/drawing/2014/main" id="{EF00E5A9-C72A-AB37-EA45-FAC43D3FEBBB}"/>
+      <p:cxnSp>
+        <p:nvCxnSpPr>
+          <p:cNvPr id="13" name="Straight Connector 12">
+            <a:extLst>
+              <a:ext uri="{FF2B5EF4-FFF2-40B4-BE49-F238E27FC236}">
+                <a16:creationId xmlns:a16="http://schemas.microsoft.com/office/drawing/2014/main" id="{32355B7F-76C0-AFDC-B162-ED473BC1E8CB}"/>
+              </a:ext>
+            </a:extLst>
+          </p:cNvPr>
+          <p:cNvCxnSpPr>
+            <a:cxnSpLocks/>
+          </p:cNvCxnSpPr>
+          <p:nvPr/>
+        </p:nvCxnSpPr>
+        <p:spPr>
+          <a:xfrm>
+            <a:off x="0" y="1014770"/>
+            <a:ext cx="12191999" cy="0"/>
+          </a:xfrm>
+          <a:prstGeom prst="line">
+            <a:avLst/>
+          </a:prstGeom>
+          <a:ln w="19050">
+            <a:solidFill>
+              <a:srgbClr val="E6E6E6"/>
+            </a:solidFill>
+          </a:ln>
+        </p:spPr>
+        <p:style>
+          <a:lnRef idx="2">
+            <a:schemeClr val="accent1"/>
+          </a:lnRef>
+          <a:fillRef idx="0">
+            <a:schemeClr val="accent1"/>
+          </a:fillRef>
+          <a:effectRef idx="1">
+            <a:schemeClr val="accent1"/>
+          </a:effectRef>
+          <a:fontRef idx="minor">
+            <a:schemeClr val="tx1"/>
+          </a:fontRef>
+        </p:style>
+      </p:cxnSp>
+      <p:pic>
+        <p:nvPicPr>
+          <p:cNvPr id="36" name="Graphic 71">
+            <a:extLst>
+              <a:ext uri="{FF2B5EF4-FFF2-40B4-BE49-F238E27FC236}">
+                <a16:creationId xmlns:a16="http://schemas.microsoft.com/office/drawing/2014/main" id="{5763CF6F-E0D8-0237-17B6-A9EF774B6C44}"/>
+              </a:ext>
+            </a:extLst>
+          </p:cNvPr>
+          <p:cNvPicPr>
+            <a:picLocks noChangeAspect="1"/>
+          </p:cNvPicPr>
+          <p:nvPr/>
+        </p:nvPicPr>
+        <p:blipFill>
+          <a:blip r:embed="rId2">
+            <a:extLst>
+              <a:ext uri="{96DAC541-7B7A-43D3-8B79-37D633B846F1}">
+                <asvg:svgBlip xmlns:asvg="http://schemas.microsoft.com/office/drawing/2016/SVG/main" r:embed="rId3"/>
+              </a:ext>
+            </a:extLst>
+          </a:blip>
+          <a:stretch>
+            <a:fillRect/>
+          </a:stretch>
+        </p:blipFill>
+        <p:spPr>
+          <a:xfrm>
+            <a:off x="64276" y="286596"/>
+            <a:ext cx="314742" cy="314743"/>
+          </a:xfrm>
+          <a:prstGeom prst="rect">
+            <a:avLst/>
+          </a:prstGeom>
+        </p:spPr>
+      </p:pic>
+      <p:cxnSp>
+        <p:nvCxnSpPr>
+          <p:cNvPr id="3" name="Straight Connector 2">
+            <a:extLst>
+              <a:ext uri="{FF2B5EF4-FFF2-40B4-BE49-F238E27FC236}">
+                <a16:creationId xmlns:a16="http://schemas.microsoft.com/office/drawing/2014/main" id="{F5DF4ED0-0B8C-4B10-EE22-E72C41EF8A95}"/>
+              </a:ext>
+            </a:extLst>
+          </p:cNvPr>
+          <p:cNvCxnSpPr>
+            <a:cxnSpLocks/>
+          </p:cNvCxnSpPr>
+          <p:nvPr/>
+        </p:nvCxnSpPr>
+        <p:spPr>
+          <a:xfrm flipV="1">
+            <a:off x="979806" y="842678"/>
+            <a:ext cx="130629" cy="175015"/>
+          </a:xfrm>
+          <a:prstGeom prst="line">
+            <a:avLst/>
+          </a:prstGeom>
+          <a:ln w="19050">
+            <a:solidFill>
+              <a:srgbClr val="E6E6E6"/>
+            </a:solidFill>
+          </a:ln>
+        </p:spPr>
+        <p:style>
+          <a:lnRef idx="2">
+            <a:schemeClr val="accent1"/>
+          </a:lnRef>
+          <a:fillRef idx="0">
+            <a:schemeClr val="accent1"/>
+          </a:fillRef>
+          <a:effectRef idx="1">
+            <a:schemeClr val="accent1"/>
+          </a:effectRef>
+          <a:fontRef idx="minor">
+            <a:schemeClr val="tx1"/>
+          </a:fontRef>
+        </p:style>
+      </p:cxnSp>
+      <p:cxnSp>
+        <p:nvCxnSpPr>
+          <p:cNvPr id="5" name="Straight Connector 4">
+            <a:extLst>
+              <a:ext uri="{FF2B5EF4-FFF2-40B4-BE49-F238E27FC236}">
+                <a16:creationId xmlns:a16="http://schemas.microsoft.com/office/drawing/2014/main" id="{BC59FA1F-520D-57F4-F826-BCB134D5EF75}"/>
+              </a:ext>
+            </a:extLst>
+          </p:cNvPr>
+          <p:cNvCxnSpPr>
+            <a:cxnSpLocks/>
+          </p:cNvCxnSpPr>
+          <p:nvPr/>
+        </p:nvCxnSpPr>
+        <p:spPr>
+          <a:xfrm flipV="1">
+            <a:off x="2240658" y="842678"/>
+            <a:ext cx="130629" cy="175015"/>
+          </a:xfrm>
+          <a:prstGeom prst="line">
+            <a:avLst/>
+          </a:prstGeom>
+          <a:ln w="19050">
+            <a:solidFill>
+              <a:srgbClr val="E6E6E6"/>
+            </a:solidFill>
+          </a:ln>
+        </p:spPr>
+        <p:style>
+          <a:lnRef idx="2">
+            <a:schemeClr val="accent1"/>
+          </a:lnRef>
+          <a:fillRef idx="0">
+            <a:schemeClr val="accent1"/>
+          </a:fillRef>
+          <a:effectRef idx="1">
+            <a:schemeClr val="accent1"/>
+          </a:effectRef>
+          <a:fontRef idx="minor">
+            <a:schemeClr val="tx1"/>
+          </a:fontRef>
+        </p:style>
+      </p:cxnSp>
+      <p:sp>
+        <p:nvSpPr>
+          <p:cNvPr id="50" name="Rectangle: Rounded Corners 49">
+            <a:extLst>
+              <a:ext uri="{FF2B5EF4-FFF2-40B4-BE49-F238E27FC236}">
+                <a16:creationId xmlns:a16="http://schemas.microsoft.com/office/drawing/2014/main" id="{D7E01B93-3A98-5FE0-808A-263F267117EC}"/>
               </a:ext>
             </a:extLst>
           </p:cNvPr>
@@ -4186,12 +5190,12 @@
         </p:nvSpPr>
         <p:spPr>
           <a:xfrm>
-            <a:off x="2388544" y="4862146"/>
-            <a:ext cx="9728135" cy="1918064"/>
+            <a:off x="64277" y="1811669"/>
+            <a:ext cx="12063448" cy="4936061"/>
           </a:xfrm>
           <a:prstGeom prst="roundRect">
             <a:avLst>
-              <a:gd name="adj" fmla="val 3381"/>
+              <a:gd name="adj" fmla="val 2103"/>
             </a:avLst>
           </a:prstGeom>
           <a:solidFill>
@@ -4224,294 +5228,14 @@
           <a:lstStyle/>
           <a:p>
             <a:pPr algn="ctr"/>
-            <a:endParaRPr lang="en-US"/>
-          </a:p>
-        </p:txBody>
-      </p:sp>
-      <p:sp>
-        <p:nvSpPr>
-          <p:cNvPr id="6" name="Rectangle: Rounded Corners 5">
-            <a:extLst>
-              <a:ext uri="{FF2B5EF4-FFF2-40B4-BE49-F238E27FC236}">
-                <a16:creationId xmlns:a16="http://schemas.microsoft.com/office/drawing/2014/main" id="{1A45855A-AFBF-7849-904F-FB9D67E39102}"/>
-              </a:ext>
-            </a:extLst>
-          </p:cNvPr>
-          <p:cNvSpPr/>
-          <p:nvPr/>
-        </p:nvSpPr>
-        <p:spPr>
-          <a:xfrm>
-            <a:off x="7290270" y="1297643"/>
-            <a:ext cx="4826410" cy="1692682"/>
-          </a:xfrm>
-          <a:prstGeom prst="roundRect">
-            <a:avLst>
-              <a:gd name="adj" fmla="val 2724"/>
-            </a:avLst>
-          </a:prstGeom>
-          <a:solidFill>
-            <a:schemeClr val="bg1"/>
-          </a:solidFill>
-          <a:ln w="15875">
-            <a:solidFill>
-              <a:srgbClr val="E6E6E6"/>
-            </a:solidFill>
-          </a:ln>
-        </p:spPr>
-        <p:style>
-          <a:lnRef idx="2">
-            <a:schemeClr val="accent1">
-              <a:shade val="15000"/>
-            </a:schemeClr>
-          </a:lnRef>
-          <a:fillRef idx="1">
-            <a:schemeClr val="accent1"/>
-          </a:fillRef>
-          <a:effectRef idx="0">
-            <a:schemeClr val="accent1"/>
-          </a:effectRef>
-          <a:fontRef idx="minor">
-            <a:schemeClr val="lt1"/>
-          </a:fontRef>
-        </p:style>
-        <p:txBody>
-          <a:bodyPr rtlCol="0" anchor="ctr"/>
-          <a:lstStyle/>
-          <a:p>
-            <a:pPr algn="ctr"/>
-            <a:endParaRPr lang="en-US"/>
-          </a:p>
-        </p:txBody>
-      </p:sp>
-      <p:sp>
-        <p:nvSpPr>
-          <p:cNvPr id="9" name="Rectangle: Rounded Corners 8">
-            <a:extLst>
-              <a:ext uri="{FF2B5EF4-FFF2-40B4-BE49-F238E27FC236}">
-                <a16:creationId xmlns:a16="http://schemas.microsoft.com/office/drawing/2014/main" id="{166FF8DF-3077-76D8-8EA5-EBBEF4805D17}"/>
-              </a:ext>
-            </a:extLst>
-          </p:cNvPr>
-          <p:cNvSpPr/>
-          <p:nvPr/>
-        </p:nvSpPr>
-        <p:spPr>
-          <a:xfrm>
-            <a:off x="2388539" y="1297643"/>
-            <a:ext cx="4826410" cy="1692682"/>
-          </a:xfrm>
-          <a:prstGeom prst="roundRect">
-            <a:avLst>
-              <a:gd name="adj" fmla="val 3700"/>
-            </a:avLst>
-          </a:prstGeom>
-          <a:solidFill>
-            <a:schemeClr val="bg1"/>
-          </a:solidFill>
-          <a:ln w="15875">
-            <a:solidFill>
-              <a:srgbClr val="E6E6E6"/>
-            </a:solidFill>
-          </a:ln>
-        </p:spPr>
-        <p:style>
-          <a:lnRef idx="2">
-            <a:schemeClr val="accent1">
-              <a:shade val="15000"/>
-            </a:schemeClr>
-          </a:lnRef>
-          <a:fillRef idx="1">
-            <a:schemeClr val="accent1"/>
-          </a:fillRef>
-          <a:effectRef idx="0">
-            <a:schemeClr val="accent1"/>
-          </a:effectRef>
-          <a:fontRef idx="minor">
-            <a:schemeClr val="lt1"/>
-          </a:fontRef>
-        </p:style>
-        <p:txBody>
-          <a:bodyPr rtlCol="0" anchor="ctr"/>
-          <a:lstStyle/>
-          <a:p>
-            <a:pPr algn="ctr"/>
             <a:endParaRPr lang="en-US" dirty="0"/>
-          </a:p>
-        </p:txBody>
-      </p:sp>
-      <p:sp>
-        <p:nvSpPr>
-          <p:cNvPr id="16" name="Rectangle: Rounded Corners 15">
-            <a:extLst>
-              <a:ext uri="{FF2B5EF4-FFF2-40B4-BE49-F238E27FC236}">
-                <a16:creationId xmlns:a16="http://schemas.microsoft.com/office/drawing/2014/main" id="{960AC450-8B9A-995B-C0B6-4406BBA3BD17}"/>
-              </a:ext>
-            </a:extLst>
-          </p:cNvPr>
-          <p:cNvSpPr/>
-          <p:nvPr/>
-        </p:nvSpPr>
-        <p:spPr>
-          <a:xfrm>
-            <a:off x="2381797" y="3077106"/>
-            <a:ext cx="4826410" cy="1692682"/>
-          </a:xfrm>
-          <a:prstGeom prst="roundRect">
-            <a:avLst>
-              <a:gd name="adj" fmla="val 2988"/>
-            </a:avLst>
-          </a:prstGeom>
-          <a:solidFill>
-            <a:schemeClr val="bg1"/>
-          </a:solidFill>
-          <a:ln w="15875">
-            <a:solidFill>
-              <a:srgbClr val="E6E6E6"/>
-            </a:solidFill>
-          </a:ln>
-        </p:spPr>
-        <p:style>
-          <a:lnRef idx="2">
-            <a:schemeClr val="accent1">
-              <a:shade val="15000"/>
-            </a:schemeClr>
-          </a:lnRef>
-          <a:fillRef idx="1">
-            <a:schemeClr val="accent1"/>
-          </a:fillRef>
-          <a:effectRef idx="0">
-            <a:schemeClr val="accent1"/>
-          </a:effectRef>
-          <a:fontRef idx="minor">
-            <a:schemeClr val="lt1"/>
-          </a:fontRef>
-        </p:style>
-        <p:txBody>
-          <a:bodyPr rtlCol="0" anchor="ctr"/>
-          <a:lstStyle/>
-          <a:p>
-            <a:pPr algn="ctr"/>
-            <a:endParaRPr lang="en-US"/>
-          </a:p>
-        </p:txBody>
-      </p:sp>
-      <p:sp>
-        <p:nvSpPr>
-          <p:cNvPr id="17" name="Rectangle: Rounded Corners 16">
-            <a:extLst>
-              <a:ext uri="{FF2B5EF4-FFF2-40B4-BE49-F238E27FC236}">
-                <a16:creationId xmlns:a16="http://schemas.microsoft.com/office/drawing/2014/main" id="{8F8EA890-6835-4A48-4E33-56320D821AC3}"/>
-              </a:ext>
-            </a:extLst>
-          </p:cNvPr>
-          <p:cNvSpPr/>
-          <p:nvPr/>
-        </p:nvSpPr>
-        <p:spPr>
-          <a:xfrm>
-            <a:off x="9754614" y="3077106"/>
-            <a:ext cx="2368801" cy="1692682"/>
-          </a:xfrm>
-          <a:prstGeom prst="roundRect">
-            <a:avLst>
-              <a:gd name="adj" fmla="val 3508"/>
-            </a:avLst>
-          </a:prstGeom>
-          <a:solidFill>
-            <a:schemeClr val="bg1"/>
-          </a:solidFill>
-          <a:ln w="15875">
-            <a:solidFill>
-              <a:srgbClr val="E6E6E6"/>
-            </a:solidFill>
-          </a:ln>
-        </p:spPr>
-        <p:style>
-          <a:lnRef idx="2">
-            <a:schemeClr val="accent1">
-              <a:shade val="15000"/>
-            </a:schemeClr>
-          </a:lnRef>
-          <a:fillRef idx="1">
-            <a:schemeClr val="accent1"/>
-          </a:fillRef>
-          <a:effectRef idx="0">
-            <a:schemeClr val="accent1"/>
-          </a:effectRef>
-          <a:fontRef idx="minor">
-            <a:schemeClr val="lt1"/>
-          </a:fontRef>
-        </p:style>
-        <p:txBody>
-          <a:bodyPr rtlCol="0" anchor="ctr"/>
-          <a:lstStyle/>
-          <a:p>
-            <a:pPr algn="ctr"/>
-            <a:endParaRPr lang="en-US"/>
-          </a:p>
-        </p:txBody>
-      </p:sp>
-      <p:sp>
-        <p:nvSpPr>
-          <p:cNvPr id="19" name="Rectangle: Rounded Corners 18">
-            <a:extLst>
-              <a:ext uri="{FF2B5EF4-FFF2-40B4-BE49-F238E27FC236}">
-                <a16:creationId xmlns:a16="http://schemas.microsoft.com/office/drawing/2014/main" id="{E838233C-2CD9-E941-850D-3FBCCFBA31E0}"/>
-              </a:ext>
-            </a:extLst>
-          </p:cNvPr>
-          <p:cNvSpPr/>
-          <p:nvPr/>
-        </p:nvSpPr>
-        <p:spPr>
-          <a:xfrm>
-            <a:off x="7290270" y="3077106"/>
-            <a:ext cx="2382279" cy="1692682"/>
-          </a:xfrm>
-          <a:prstGeom prst="roundRect">
-            <a:avLst>
-              <a:gd name="adj" fmla="val 2957"/>
-            </a:avLst>
-          </a:prstGeom>
-          <a:solidFill>
-            <a:schemeClr val="bg1"/>
-          </a:solidFill>
-          <a:ln w="15875">
-            <a:solidFill>
-              <a:srgbClr val="E6E6E6"/>
-            </a:solidFill>
-          </a:ln>
-        </p:spPr>
-        <p:style>
-          <a:lnRef idx="2">
-            <a:schemeClr val="accent1">
-              <a:shade val="15000"/>
-            </a:schemeClr>
-          </a:lnRef>
-          <a:fillRef idx="1">
-            <a:schemeClr val="accent1"/>
-          </a:fillRef>
-          <a:effectRef idx="0">
-            <a:schemeClr val="accent1"/>
-          </a:effectRef>
-          <a:fontRef idx="minor">
-            <a:schemeClr val="lt1"/>
-          </a:fontRef>
-        </p:style>
-        <p:txBody>
-          <a:bodyPr rtlCol="0" anchor="ctr"/>
-          <a:lstStyle/>
-          <a:p>
-            <a:pPr algn="ctr"/>
-            <a:endParaRPr lang="en-US"/>
           </a:p>
         </p:txBody>
       </p:sp>
     </p:spTree>
     <p:extLst>
       <p:ext uri="{BB962C8B-B14F-4D97-AF65-F5344CB8AC3E}">
-        <p14:creationId xmlns:p14="http://schemas.microsoft.com/office/powerpoint/2010/main" val="2052799432"/>
+        <p14:creationId xmlns:p14="http://schemas.microsoft.com/office/powerpoint/2010/main" val="4158294884"/>
       </p:ext>
     </p:extLst>
   </p:cSld>
@@ -4521,12 +5245,18 @@
 </p:sld>
 </file>
 
-<file path=ppt/slides/slide2.xml><?xml version="1.0" encoding="utf-8"?>
+<file path=ppt/slides/slide3.xml><?xml version="1.0" encoding="utf-8"?>
 <p:sld xmlns:a="http://schemas.openxmlformats.org/drawingml/2006/main" xmlns:r="http://schemas.openxmlformats.org/officeDocument/2006/relationships" xmlns:p="http://schemas.openxmlformats.org/presentationml/2006/main">
   <p:cSld>
     <p:spTree>
       <p:nvGrpSpPr>
-        <p:cNvPr id="1" name=""/>
+        <p:cNvPr id="1" name="">
+          <a:extLst>
+            <a:ext uri="{FF2B5EF4-FFF2-40B4-BE49-F238E27FC236}">
+              <a16:creationId xmlns:a16="http://schemas.microsoft.com/office/drawing/2014/main" id="{044FE92C-5431-4A9F-72A6-C1600861BCBF}"/>
+            </a:ext>
+          </a:extLst>
+        </p:cNvPr>
         <p:cNvGrpSpPr/>
         <p:nvPr/>
       </p:nvGrpSpPr>
@@ -4543,7 +5273,7 @@
           <p:cNvPr id="15" name="Rectangle 14">
             <a:extLst>
               <a:ext uri="{FF2B5EF4-FFF2-40B4-BE49-F238E27FC236}">
-                <a16:creationId xmlns:a16="http://schemas.microsoft.com/office/drawing/2014/main" id="{64BA61B2-BD66-0368-4174-251EFDB283C7}"/>
+                <a16:creationId xmlns:a16="http://schemas.microsoft.com/office/drawing/2014/main" id="{F6B6131A-260A-1297-45B7-B6F8AA0694ED}"/>
               </a:ext>
             </a:extLst>
           </p:cNvPr>
@@ -4552,8 +5282,60 @@
         </p:nvSpPr>
         <p:spPr>
           <a:xfrm>
-            <a:off x="1" y="795222"/>
-            <a:ext cx="12192000" cy="6062778"/>
+            <a:off x="0" y="45719"/>
+            <a:ext cx="12191999" cy="6812281"/>
+          </a:xfrm>
+          <a:prstGeom prst="rect">
+            <a:avLst/>
+          </a:prstGeom>
+          <a:solidFill>
+            <a:schemeClr val="bg1"/>
+          </a:solidFill>
+          <a:ln>
+            <a:noFill/>
+          </a:ln>
+        </p:spPr>
+        <p:style>
+          <a:lnRef idx="2">
+            <a:schemeClr val="accent1">
+              <a:shade val="15000"/>
+            </a:schemeClr>
+          </a:lnRef>
+          <a:fillRef idx="1">
+            <a:schemeClr val="accent1"/>
+          </a:fillRef>
+          <a:effectRef idx="0">
+            <a:schemeClr val="accent1"/>
+          </a:effectRef>
+          <a:fontRef idx="minor">
+            <a:schemeClr val="lt1"/>
+          </a:fontRef>
+        </p:style>
+        <p:txBody>
+          <a:bodyPr rtlCol="0" anchor="ctr"/>
+          <a:lstStyle/>
+          <a:p>
+            <a:pPr algn="ctr"/>
+            <a:endParaRPr lang="en-US"/>
+          </a:p>
+        </p:txBody>
+      </p:sp>
+      <p:sp>
+        <p:nvSpPr>
+          <p:cNvPr id="2" name="Rectangle 1">
+            <a:extLst>
+              <a:ext uri="{FF2B5EF4-FFF2-40B4-BE49-F238E27FC236}">
+                <a16:creationId xmlns:a16="http://schemas.microsoft.com/office/drawing/2014/main" id="{8578E996-F275-EF8F-ABBA-1E29F0159A2F}"/>
+              </a:ext>
+            </a:extLst>
+          </p:cNvPr>
+          <p:cNvSpPr/>
+          <p:nvPr/>
+        </p:nvSpPr>
+        <p:spPr>
+          <a:xfrm>
+            <a:off x="-2" y="1015674"/>
+            <a:ext cx="12192002" cy="5843228"/>
           </a:xfrm>
           <a:prstGeom prst="rect">
             <a:avLst/>
@@ -4586,7 +5368,7 @@
           <a:lstStyle/>
           <a:p>
             <a:pPr algn="ctr"/>
-            <a:endParaRPr lang="en-US" dirty="0"/>
+            <a:endParaRPr lang="en-US"/>
           </a:p>
         </p:txBody>
       </p:sp>
@@ -4595,7 +5377,7 @@
           <p:cNvPr id="4" name="Rectangle 3">
             <a:extLst>
               <a:ext uri="{FF2B5EF4-FFF2-40B4-BE49-F238E27FC236}">
-                <a16:creationId xmlns:a16="http://schemas.microsoft.com/office/drawing/2014/main" id="{531CE1DC-0C49-0AE2-5005-3EEEE4AB949B}"/>
+                <a16:creationId xmlns:a16="http://schemas.microsoft.com/office/drawing/2014/main" id="{362160EA-7E21-0525-B2B0-3DADBCC9ECE6}"/>
               </a:ext>
             </a:extLst>
           </p:cNvPr>
@@ -4610,9 +5392,21 @@
           <a:prstGeom prst="rect">
             <a:avLst/>
           </a:prstGeom>
-          <a:solidFill>
-            <a:srgbClr val="19B294"/>
-          </a:solidFill>
+          <a:gradFill flip="none" rotWithShape="1">
+            <a:gsLst>
+              <a:gs pos="50000">
+                <a:srgbClr val="239680"/>
+              </a:gs>
+              <a:gs pos="0">
+                <a:srgbClr val="84E9AB"/>
+              </a:gs>
+              <a:gs pos="100000">
+                <a:srgbClr val="1C8979"/>
+              </a:gs>
+            </a:gsLst>
+            <a:lin ang="0" scaled="1"/>
+            <a:tileRect/>
+          </a:gradFill>
           <a:ln>
             <a:noFill/>
           </a:ln>
@@ -4642,91 +5436,12 @@
           </a:p>
         </p:txBody>
       </p:sp>
-      <p:cxnSp>
-        <p:nvCxnSpPr>
-          <p:cNvPr id="13" name="Straight Connector 12">
-            <a:extLst>
-              <a:ext uri="{FF2B5EF4-FFF2-40B4-BE49-F238E27FC236}">
-                <a16:creationId xmlns:a16="http://schemas.microsoft.com/office/drawing/2014/main" id="{A65D33EA-0B4D-A8EB-C571-33D8DB283F4A}"/>
-              </a:ext>
-            </a:extLst>
-          </p:cNvPr>
-          <p:cNvCxnSpPr>
-            <a:cxnSpLocks/>
-          </p:cNvCxnSpPr>
-          <p:nvPr/>
-        </p:nvCxnSpPr>
-        <p:spPr>
-          <a:xfrm>
-            <a:off x="0" y="795222"/>
-            <a:ext cx="12191999" cy="0"/>
-          </a:xfrm>
-          <a:prstGeom prst="line">
-            <a:avLst/>
-          </a:prstGeom>
-          <a:ln w="19050">
-            <a:solidFill>
-              <a:srgbClr val="E6E6E6"/>
-            </a:solidFill>
-          </a:ln>
-        </p:spPr>
-        <p:style>
-          <a:lnRef idx="2">
-            <a:schemeClr val="accent1"/>
-          </a:lnRef>
-          <a:fillRef idx="0">
-            <a:schemeClr val="accent1"/>
-          </a:fillRef>
-          <a:effectRef idx="1">
-            <a:schemeClr val="accent1"/>
-          </a:effectRef>
-          <a:fontRef idx="minor">
-            <a:schemeClr val="tx1"/>
-          </a:fontRef>
-        </p:style>
-      </p:cxnSp>
-      <p:pic>
-        <p:nvPicPr>
-          <p:cNvPr id="36" name="Graphic 71">
-            <a:extLst>
-              <a:ext uri="{FF2B5EF4-FFF2-40B4-BE49-F238E27FC236}">
-                <a16:creationId xmlns:a16="http://schemas.microsoft.com/office/drawing/2014/main" id="{A7DE80AD-7BA2-5D0D-4237-F7E3ED2212D7}"/>
-              </a:ext>
-            </a:extLst>
-          </p:cNvPr>
-          <p:cNvPicPr>
-            <a:picLocks noChangeAspect="1"/>
-          </p:cNvPicPr>
-          <p:nvPr/>
-        </p:nvPicPr>
-        <p:blipFill>
-          <a:blip r:embed="rId3">
-            <a:extLst>
-              <a:ext uri="{96DAC541-7B7A-43D3-8B79-37D633B846F1}">
-                <asvg:svgBlip xmlns:asvg="http://schemas.microsoft.com/office/drawing/2016/SVG/main" r:embed="rId4"/>
-              </a:ext>
-            </a:extLst>
-          </a:blip>
-          <a:stretch>
-            <a:fillRect/>
-          </a:stretch>
-        </p:blipFill>
-        <p:spPr>
-          <a:xfrm>
-            <a:off x="64276" y="286596"/>
-            <a:ext cx="314742" cy="314743"/>
-          </a:xfrm>
-          <a:prstGeom prst="rect">
-            <a:avLst/>
-          </a:prstGeom>
-        </p:spPr>
-      </p:pic>
-      <p:sp>
-        <p:nvSpPr>
-          <p:cNvPr id="2" name="Rectangle: Rounded Corners 1">
-            <a:extLst>
-              <a:ext uri="{FF2B5EF4-FFF2-40B4-BE49-F238E27FC236}">
-                <a16:creationId xmlns:a16="http://schemas.microsoft.com/office/drawing/2014/main" id="{9FAA9463-AFAE-9343-548B-088BB54B602C}"/>
+      <p:sp>
+        <p:nvSpPr>
+          <p:cNvPr id="7" name="Rectangle: Rounded Corners 6">
+            <a:extLst>
+              <a:ext uri="{FF2B5EF4-FFF2-40B4-BE49-F238E27FC236}">
+                <a16:creationId xmlns:a16="http://schemas.microsoft.com/office/drawing/2014/main" id="{0B2AC0DC-E6EE-95DD-3782-9AFF026E285D}"/>
               </a:ext>
             </a:extLst>
           </p:cNvPr>
@@ -4735,120 +5450,8 @@
         </p:nvSpPr>
         <p:spPr>
           <a:xfrm>
-            <a:off x="75316" y="872469"/>
-            <a:ext cx="2237913" cy="5907743"/>
-          </a:xfrm>
-          <a:prstGeom prst="roundRect">
-            <a:avLst>
-              <a:gd name="adj" fmla="val 1884"/>
-            </a:avLst>
-          </a:prstGeom>
-          <a:solidFill>
-            <a:schemeClr val="bg1"/>
-          </a:solidFill>
-          <a:ln w="15875">
-            <a:solidFill>
-              <a:srgbClr val="E6E6E6"/>
-            </a:solidFill>
-          </a:ln>
-        </p:spPr>
-        <p:style>
-          <a:lnRef idx="2">
-            <a:schemeClr val="accent1">
-              <a:shade val="15000"/>
-            </a:schemeClr>
-          </a:lnRef>
-          <a:fillRef idx="1">
-            <a:schemeClr val="accent1"/>
-          </a:fillRef>
-          <a:effectRef idx="0">
-            <a:schemeClr val="accent1"/>
-          </a:effectRef>
-          <a:fontRef idx="minor">
-            <a:schemeClr val="lt1"/>
-          </a:fontRef>
-        </p:style>
-        <p:txBody>
-          <a:bodyPr rtlCol="0" anchor="ctr"/>
-          <a:lstStyle/>
-          <a:p>
-            <a:pPr algn="ctr"/>
-            <a:endParaRPr lang="en-US"/>
-          </a:p>
-        </p:txBody>
-      </p:sp>
-      <p:sp>
-        <p:nvSpPr>
-          <p:cNvPr id="8" name="Rectangle: Rounded Corners 7">
-            <a:extLst>
-              <a:ext uri="{FF2B5EF4-FFF2-40B4-BE49-F238E27FC236}">
-                <a16:creationId xmlns:a16="http://schemas.microsoft.com/office/drawing/2014/main" id="{6ABB7951-44A0-5975-B0BF-C06F15B733CD}"/>
-              </a:ext>
-            </a:extLst>
-          </p:cNvPr>
-          <p:cNvSpPr/>
-          <p:nvPr/>
-        </p:nvSpPr>
-        <p:spPr>
-          <a:xfrm>
-            <a:off x="2388544" y="1297644"/>
-            <a:ext cx="9730229" cy="5482566"/>
-          </a:xfrm>
-          <a:prstGeom prst="roundRect">
-            <a:avLst>
-              <a:gd name="adj" fmla="val 519"/>
-            </a:avLst>
-          </a:prstGeom>
-          <a:solidFill>
-            <a:schemeClr val="bg1"/>
-          </a:solidFill>
-          <a:ln w="15875">
-            <a:solidFill>
-              <a:srgbClr val="E6E6E6"/>
-            </a:solidFill>
-          </a:ln>
-        </p:spPr>
-        <p:style>
-          <a:lnRef idx="2">
-            <a:schemeClr val="accent1">
-              <a:shade val="15000"/>
-            </a:schemeClr>
-          </a:lnRef>
-          <a:fillRef idx="1">
-            <a:schemeClr val="accent1"/>
-          </a:fillRef>
-          <a:effectRef idx="0">
-            <a:schemeClr val="accent1"/>
-          </a:effectRef>
-          <a:fontRef idx="minor">
-            <a:schemeClr val="lt1"/>
-          </a:fontRef>
-        </p:style>
-        <p:txBody>
-          <a:bodyPr rtlCol="0" anchor="ctr"/>
-          <a:lstStyle/>
-          <a:p>
-            <a:pPr algn="ctr"/>
-            <a:endParaRPr lang="en-US"/>
-          </a:p>
-        </p:txBody>
-      </p:sp>
-      <p:sp>
-        <p:nvSpPr>
-          <p:cNvPr id="5" name="Rectangle: Rounded Corners 4">
-            <a:extLst>
-              <a:ext uri="{FF2B5EF4-FFF2-40B4-BE49-F238E27FC236}">
-                <a16:creationId xmlns:a16="http://schemas.microsoft.com/office/drawing/2014/main" id="{763CF1B4-0CBA-5BC8-6CBD-4973A74F5313}"/>
-              </a:ext>
-            </a:extLst>
-          </p:cNvPr>
-          <p:cNvSpPr/>
-          <p:nvPr/>
-        </p:nvSpPr>
-        <p:spPr>
-          <a:xfrm>
-            <a:off x="3406315" y="117526"/>
-            <a:ext cx="8721410" cy="587661"/>
+            <a:off x="3085323" y="110269"/>
+            <a:ext cx="9042401" cy="654838"/>
           </a:xfrm>
           <a:prstGeom prst="roundRect">
             <a:avLst>
@@ -4889,10 +5492,231 @@
           </a:p>
         </p:txBody>
       </p:sp>
+      <p:cxnSp>
+        <p:nvCxnSpPr>
+          <p:cNvPr id="13" name="Straight Connector 12">
+            <a:extLst>
+              <a:ext uri="{FF2B5EF4-FFF2-40B4-BE49-F238E27FC236}">
+                <a16:creationId xmlns:a16="http://schemas.microsoft.com/office/drawing/2014/main" id="{5B02A875-35A0-A92A-4F86-23EBAAD5CDAC}"/>
+              </a:ext>
+            </a:extLst>
+          </p:cNvPr>
+          <p:cNvCxnSpPr>
+            <a:cxnSpLocks/>
+          </p:cNvCxnSpPr>
+          <p:nvPr/>
+        </p:nvCxnSpPr>
+        <p:spPr>
+          <a:xfrm>
+            <a:off x="0" y="1014770"/>
+            <a:ext cx="12191999" cy="0"/>
+          </a:xfrm>
+          <a:prstGeom prst="line">
+            <a:avLst/>
+          </a:prstGeom>
+          <a:ln w="19050">
+            <a:solidFill>
+              <a:srgbClr val="E6E6E6"/>
+            </a:solidFill>
+          </a:ln>
+        </p:spPr>
+        <p:style>
+          <a:lnRef idx="2">
+            <a:schemeClr val="accent1"/>
+          </a:lnRef>
+          <a:fillRef idx="0">
+            <a:schemeClr val="accent1"/>
+          </a:fillRef>
+          <a:effectRef idx="1">
+            <a:schemeClr val="accent1"/>
+          </a:effectRef>
+          <a:fontRef idx="minor">
+            <a:schemeClr val="tx1"/>
+          </a:fontRef>
+        </p:style>
+      </p:cxnSp>
+      <p:pic>
+        <p:nvPicPr>
+          <p:cNvPr id="36" name="Graphic 71">
+            <a:extLst>
+              <a:ext uri="{FF2B5EF4-FFF2-40B4-BE49-F238E27FC236}">
+                <a16:creationId xmlns:a16="http://schemas.microsoft.com/office/drawing/2014/main" id="{AC831C74-2121-DED9-02B5-9141FC41641B}"/>
+              </a:ext>
+            </a:extLst>
+          </p:cNvPr>
+          <p:cNvPicPr>
+            <a:picLocks noChangeAspect="1"/>
+          </p:cNvPicPr>
+          <p:nvPr/>
+        </p:nvPicPr>
+        <p:blipFill>
+          <a:blip r:embed="rId2">
+            <a:extLst>
+              <a:ext uri="{96DAC541-7B7A-43D3-8B79-37D633B846F1}">
+                <asvg:svgBlip xmlns:asvg="http://schemas.microsoft.com/office/drawing/2016/SVG/main" r:embed="rId3"/>
+              </a:ext>
+            </a:extLst>
+          </a:blip>
+          <a:stretch>
+            <a:fillRect/>
+          </a:stretch>
+        </p:blipFill>
+        <p:spPr>
+          <a:xfrm>
+            <a:off x="64276" y="286596"/>
+            <a:ext cx="314742" cy="314743"/>
+          </a:xfrm>
+          <a:prstGeom prst="rect">
+            <a:avLst/>
+          </a:prstGeom>
+        </p:spPr>
+      </p:pic>
+      <p:cxnSp>
+        <p:nvCxnSpPr>
+          <p:cNvPr id="3" name="Straight Connector 2">
+            <a:extLst>
+              <a:ext uri="{FF2B5EF4-FFF2-40B4-BE49-F238E27FC236}">
+                <a16:creationId xmlns:a16="http://schemas.microsoft.com/office/drawing/2014/main" id="{5DF1BCF6-460E-B1ED-4B2F-CDF4BF63D9F1}"/>
+              </a:ext>
+            </a:extLst>
+          </p:cNvPr>
+          <p:cNvCxnSpPr>
+            <a:cxnSpLocks/>
+          </p:cNvCxnSpPr>
+          <p:nvPr/>
+        </p:nvCxnSpPr>
+        <p:spPr>
+          <a:xfrm flipV="1">
+            <a:off x="979806" y="842678"/>
+            <a:ext cx="130629" cy="175015"/>
+          </a:xfrm>
+          <a:prstGeom prst="line">
+            <a:avLst/>
+          </a:prstGeom>
+          <a:ln w="19050">
+            <a:solidFill>
+              <a:srgbClr val="E6E6E6"/>
+            </a:solidFill>
+          </a:ln>
+        </p:spPr>
+        <p:style>
+          <a:lnRef idx="2">
+            <a:schemeClr val="accent1"/>
+          </a:lnRef>
+          <a:fillRef idx="0">
+            <a:schemeClr val="accent1"/>
+          </a:fillRef>
+          <a:effectRef idx="1">
+            <a:schemeClr val="accent1"/>
+          </a:effectRef>
+          <a:fontRef idx="minor">
+            <a:schemeClr val="tx1"/>
+          </a:fontRef>
+        </p:style>
+      </p:cxnSp>
+      <p:cxnSp>
+        <p:nvCxnSpPr>
+          <p:cNvPr id="5" name="Straight Connector 4">
+            <a:extLst>
+              <a:ext uri="{FF2B5EF4-FFF2-40B4-BE49-F238E27FC236}">
+                <a16:creationId xmlns:a16="http://schemas.microsoft.com/office/drawing/2014/main" id="{13AC53BB-83E9-500E-475D-C0FCDDBD3ACF}"/>
+              </a:ext>
+            </a:extLst>
+          </p:cNvPr>
+          <p:cNvCxnSpPr>
+            <a:cxnSpLocks/>
+          </p:cNvCxnSpPr>
+          <p:nvPr/>
+        </p:nvCxnSpPr>
+        <p:spPr>
+          <a:xfrm flipV="1">
+            <a:off x="2240658" y="842678"/>
+            <a:ext cx="130629" cy="175015"/>
+          </a:xfrm>
+          <a:prstGeom prst="line">
+            <a:avLst/>
+          </a:prstGeom>
+          <a:ln w="19050">
+            <a:solidFill>
+              <a:srgbClr val="E6E6E6"/>
+            </a:solidFill>
+          </a:ln>
+        </p:spPr>
+        <p:style>
+          <a:lnRef idx="2">
+            <a:schemeClr val="accent1"/>
+          </a:lnRef>
+          <a:fillRef idx="0">
+            <a:schemeClr val="accent1"/>
+          </a:fillRef>
+          <a:effectRef idx="1">
+            <a:schemeClr val="accent1"/>
+          </a:effectRef>
+          <a:fontRef idx="minor">
+            <a:schemeClr val="tx1"/>
+          </a:fontRef>
+        </p:style>
+      </p:cxnSp>
+      <p:sp>
+        <p:nvSpPr>
+          <p:cNvPr id="50" name="Rectangle: Rounded Corners 49">
+            <a:extLst>
+              <a:ext uri="{FF2B5EF4-FFF2-40B4-BE49-F238E27FC236}">
+                <a16:creationId xmlns:a16="http://schemas.microsoft.com/office/drawing/2014/main" id="{EC827F60-5708-138F-1E25-B6FBA8E2C2B4}"/>
+              </a:ext>
+            </a:extLst>
+          </p:cNvPr>
+          <p:cNvSpPr/>
+          <p:nvPr/>
+        </p:nvSpPr>
+        <p:spPr>
+          <a:xfrm>
+            <a:off x="64277" y="1264435"/>
+            <a:ext cx="12063448" cy="5483296"/>
+          </a:xfrm>
+          <a:prstGeom prst="roundRect">
+            <a:avLst>
+              <a:gd name="adj" fmla="val 2103"/>
+            </a:avLst>
+          </a:prstGeom>
+          <a:solidFill>
+            <a:schemeClr val="bg1"/>
+          </a:solidFill>
+          <a:ln w="15875">
+            <a:solidFill>
+              <a:srgbClr val="E6E6E6"/>
+            </a:solidFill>
+          </a:ln>
+        </p:spPr>
+        <p:style>
+          <a:lnRef idx="2">
+            <a:schemeClr val="accent1">
+              <a:shade val="15000"/>
+            </a:schemeClr>
+          </a:lnRef>
+          <a:fillRef idx="1">
+            <a:schemeClr val="accent1"/>
+          </a:fillRef>
+          <a:effectRef idx="0">
+            <a:schemeClr val="accent1"/>
+          </a:effectRef>
+          <a:fontRef idx="minor">
+            <a:schemeClr val="lt1"/>
+          </a:fontRef>
+        </p:style>
+        <p:txBody>
+          <a:bodyPr rtlCol="0" anchor="ctr"/>
+          <a:lstStyle/>
+          <a:p>
+            <a:pPr algn="ctr"/>
+            <a:endParaRPr lang="en-US" dirty="0"/>
+          </a:p>
+        </p:txBody>
+      </p:sp>
     </p:spTree>
     <p:extLst>
       <p:ext uri="{BB962C8B-B14F-4D97-AF65-F5344CB8AC3E}">
-        <p14:creationId xmlns:p14="http://schemas.microsoft.com/office/powerpoint/2010/main" val="1758986721"/>
+        <p14:creationId xmlns:p14="http://schemas.microsoft.com/office/powerpoint/2010/main" val="1123077377"/>
       </p:ext>
     </p:extLst>
   </p:cSld>
@@ -5530,4 +6354,10 @@
     </a:ext>
   </a:extLst>
 </a:theme>
+</file>
+
+<file path=docMetadata/LabelInfo.xml><?xml version="1.0" encoding="utf-8"?>
+<clbl:labelList xmlns:clbl="http://schemas.microsoft.com/office/2020/mipLabelMetadata">
+  <clbl:label id="{f42aa342-8706-4288-bd11-ebb85995028c}" enabled="1" method="Standard" siteId="{72f988bf-86f1-41af-91ab-2d7cd011db47}" contentBits="0" removed="0"/>
+</clbl:labelList>
 </file>